--- a/Swim-Water-Safety_Years_9-10.pptx
+++ b/Swim-Water-Safety_Years_9-10.pptx
@@ -44,6 +44,7 @@
     <p:sldId id="292" r:id="rId38"/>
     <p:sldId id="293" r:id="rId39"/>
     <p:sldId id="294" r:id="rId40"/>
+    <p:sldId id="295" r:id="rId46"/>
   </p:sldIdLst>
   <p:notesMasterIdLst>
     <p:notesMasterId r:id="rId41"/>
@@ -4276,6 +4277,10 @@
           </a:solidFill>
           <a:ln/>
         </p:spPr>
+        <p:txBody>
+          <a:bodyPr/>
+          <a:p/>
+        </p:txBody>
       </p:sp>
       <p:sp>
         <p:nvSpPr>
@@ -4674,6 +4679,10 @@
           </a:solidFill>
           <a:ln/>
         </p:spPr>
+        <p:txBody>
+          <a:bodyPr/>
+          <a:p/>
+        </p:txBody>
       </p:sp>
       <p:sp>
         <p:nvSpPr>
@@ -5017,6 +5026,10 @@
           </a:solidFill>
           <a:ln/>
         </p:spPr>
+        <p:txBody>
+          <a:bodyPr/>
+          <a:p/>
+        </p:txBody>
       </p:sp>
       <p:sp>
         <p:nvSpPr>
@@ -5174,6 +5187,10 @@
             <a:prstDash val="solid"/>
           </a:ln>
         </p:spPr>
+        <p:txBody>
+          <a:bodyPr/>
+          <a:p/>
+        </p:txBody>
       </p:sp>
       <p:sp>
         <p:nvSpPr>
@@ -5239,6 +5256,10 @@
             <a:prstDash val="solid"/>
           </a:ln>
         </p:spPr>
+        <p:txBody>
+          <a:bodyPr/>
+          <a:p/>
+        </p:txBody>
       </p:sp>
       <p:sp>
         <p:nvSpPr>
@@ -5304,6 +5325,10 @@
             <a:prstDash val="solid"/>
           </a:ln>
         </p:spPr>
+        <p:txBody>
+          <a:bodyPr/>
+          <a:p/>
+        </p:txBody>
       </p:sp>
       <p:sp>
         <p:nvSpPr>
@@ -5482,6 +5507,10 @@
           </a:solidFill>
           <a:ln/>
         </p:spPr>
+        <p:txBody>
+          <a:bodyPr/>
+          <a:p/>
+        </p:txBody>
       </p:sp>
       <p:sp>
         <p:nvSpPr>
@@ -5628,6 +5657,10 @@
           </a:solidFill>
           <a:ln/>
         </p:spPr>
+        <p:txBody>
+          <a:bodyPr/>
+          <a:p/>
+        </p:txBody>
       </p:sp>
       <p:sp>
         <p:nvSpPr>
@@ -5808,6 +5841,10 @@
           </a:solidFill>
           <a:ln/>
         </p:spPr>
+        <p:txBody>
+          <a:bodyPr/>
+          <a:p/>
+        </p:txBody>
       </p:sp>
       <p:sp>
         <p:nvSpPr>
@@ -5954,6 +5991,10 @@
           </a:solidFill>
           <a:ln/>
         </p:spPr>
+        <p:txBody>
+          <a:bodyPr/>
+          <a:p/>
+        </p:txBody>
       </p:sp>
       <p:sp>
         <p:nvSpPr>
@@ -6100,6 +6141,10 @@
           </a:solidFill>
           <a:ln/>
         </p:spPr>
+        <p:txBody>
+          <a:bodyPr/>
+          <a:p/>
+        </p:txBody>
       </p:sp>
       <p:sp>
         <p:nvSpPr>
@@ -6360,6 +6405,10 @@
           </a:solidFill>
           <a:ln/>
         </p:spPr>
+        <p:txBody>
+          <a:bodyPr/>
+          <a:p/>
+        </p:txBody>
       </p:sp>
       <p:sp>
         <p:nvSpPr>
@@ -7210,6 +7259,10 @@
           </a:solidFill>
           <a:ln/>
         </p:spPr>
+        <p:txBody>
+          <a:bodyPr/>
+          <a:p/>
+        </p:txBody>
       </p:sp>
       <p:sp>
         <p:nvSpPr>
@@ -7590,6 +7643,10 @@
             <a:prstDash val="solid"/>
           </a:ln>
         </p:spPr>
+        <p:txBody>
+          <a:bodyPr/>
+          <a:p/>
+        </p:txBody>
       </p:sp>
       <p:sp>
         <p:nvSpPr>
@@ -7744,6 +7801,10 @@
             <a:prstDash val="solid"/>
           </a:ln>
         </p:spPr>
+        <p:txBody>
+          <a:bodyPr/>
+          <a:p/>
+        </p:txBody>
       </p:sp>
       <p:sp>
         <p:nvSpPr>
@@ -7893,6 +7954,10 @@
           </a:solidFill>
           <a:ln/>
         </p:spPr>
+        <p:txBody>
+          <a:bodyPr/>
+          <a:p/>
+        </p:txBody>
       </p:sp>
       <p:sp>
         <p:nvSpPr>
@@ -7913,6 +7978,10 @@
           </a:solidFill>
           <a:ln/>
         </p:spPr>
+        <p:txBody>
+          <a:bodyPr/>
+          <a:p/>
+        </p:txBody>
       </p:sp>
       <p:sp>
         <p:nvSpPr>
@@ -7933,6 +8002,10 @@
           </a:solidFill>
           <a:ln/>
         </p:spPr>
+        <p:txBody>
+          <a:bodyPr/>
+          <a:p/>
+        </p:txBody>
       </p:sp>
       <p:sp>
         <p:nvSpPr>
@@ -7953,6 +8026,10 @@
           </a:solidFill>
           <a:ln/>
         </p:spPr>
+        <p:txBody>
+          <a:bodyPr/>
+          <a:p/>
+        </p:txBody>
       </p:sp>
       <p:sp>
         <p:nvSpPr>
@@ -7973,6 +8050,10 @@
           </a:solidFill>
           <a:ln/>
         </p:spPr>
+        <p:txBody>
+          <a:bodyPr/>
+          <a:p/>
+        </p:txBody>
       </p:sp>
       <p:sp>
         <p:nvSpPr>
@@ -8139,6 +8220,10 @@
           </a:solidFill>
           <a:ln/>
         </p:spPr>
+        <p:txBody>
+          <a:bodyPr/>
+          <a:p/>
+        </p:txBody>
       </p:sp>
       <p:sp>
         <p:nvSpPr>
@@ -8159,6 +8244,10 @@
           </a:solidFill>
           <a:ln/>
         </p:spPr>
+        <p:txBody>
+          <a:bodyPr/>
+          <a:p/>
+        </p:txBody>
       </p:sp>
       <p:sp>
         <p:nvSpPr>
@@ -8179,6 +8268,10 @@
           </a:solidFill>
           <a:ln/>
         </p:spPr>
+        <p:txBody>
+          <a:bodyPr/>
+          <a:p/>
+        </p:txBody>
       </p:sp>
       <p:sp>
         <p:nvSpPr>
@@ -8199,6 +8292,10 @@
           </a:solidFill>
           <a:ln/>
         </p:spPr>
+        <p:txBody>
+          <a:bodyPr/>
+          <a:p/>
+        </p:txBody>
       </p:sp>
       <p:sp>
         <p:nvSpPr>
@@ -8219,6 +8316,10 @@
           </a:solidFill>
           <a:ln/>
         </p:spPr>
+        <p:txBody>
+          <a:bodyPr/>
+          <a:p/>
+        </p:txBody>
       </p:sp>
       <p:sp>
         <p:nvSpPr>
@@ -8567,6 +8668,10 @@
           </a:solidFill>
           <a:ln/>
         </p:spPr>
+        <p:txBody>
+          <a:bodyPr/>
+          <a:p/>
+        </p:txBody>
       </p:sp>
       <p:sp>
         <p:nvSpPr>
@@ -8874,6 +8979,10 @@
           </a:solidFill>
           <a:ln/>
         </p:spPr>
+        <p:txBody>
+          <a:bodyPr/>
+          <a:p/>
+        </p:txBody>
       </p:sp>
       <p:sp>
         <p:nvSpPr>
@@ -9031,6 +9140,10 @@
             <a:prstDash val="solid"/>
           </a:ln>
         </p:spPr>
+        <p:txBody>
+          <a:bodyPr/>
+          <a:p/>
+        </p:txBody>
       </p:sp>
       <p:sp>
         <p:nvSpPr>
@@ -9096,6 +9209,10 @@
             <a:prstDash val="solid"/>
           </a:ln>
         </p:spPr>
+        <p:txBody>
+          <a:bodyPr/>
+          <a:p/>
+        </p:txBody>
       </p:sp>
       <p:sp>
         <p:nvSpPr>
@@ -9161,6 +9278,10 @@
             <a:prstDash val="solid"/>
           </a:ln>
         </p:spPr>
+        <p:txBody>
+          <a:bodyPr/>
+          <a:p/>
+        </p:txBody>
       </p:sp>
       <p:sp>
         <p:nvSpPr>
@@ -9344,6 +9465,10 @@
             <a:prstDash val="solid"/>
           </a:ln>
         </p:spPr>
+        <p:txBody>
+          <a:bodyPr/>
+          <a:p/>
+        </p:txBody>
       </p:sp>
       <p:sp>
         <p:nvSpPr>
@@ -9405,6 +9530,10 @@
           </a:solidFill>
           <a:ln/>
         </p:spPr>
+        <p:txBody>
+          <a:bodyPr/>
+          <a:p/>
+        </p:txBody>
       </p:sp>
       <p:sp>
         <p:nvSpPr>
@@ -9532,7 +9661,7 @@
                 <a:ea typeface="Arial" pitchFamily="34" charset="-122"/>
                 <a:cs typeface="Arial" pitchFamily="34" charset="-120"/>
               </a:rPr>
-              <a:t>True — but incomplete. It can't explain a 40% over-representation or an 80% male skew.</a:t>
+              <a:t>True — but incomplete. It can't explain why 37% of deaths since 2015–16 were people from multicultural backgrounds, or a 73% male skew.</a:t>
             </a:r>
             <a:endParaRPr lang="en-US" sz="1950" dirty="0"/>
           </a:p>
@@ -9557,6 +9686,10 @@
           </a:solidFill>
           <a:ln/>
         </p:spPr>
+        <p:txBody>
+          <a:bodyPr/>
+          <a:p/>
+        </p:txBody>
       </p:sp>
       <p:sp>
         <p:nvSpPr>
@@ -9620,6 +9753,10 @@
           </a:solidFill>
           <a:ln/>
         </p:spPr>
+        <p:txBody>
+          <a:bodyPr/>
+          <a:p/>
+        </p:txBody>
       </p:sp>
       <p:sp>
         <p:nvSpPr>
@@ -10016,6 +10153,10 @@
             <a:prstDash val="solid"/>
           </a:ln>
         </p:spPr>
+        <p:txBody>
+          <a:bodyPr/>
+          <a:p/>
+        </p:txBody>
       </p:sp>
       <p:sp>
         <p:nvSpPr>
@@ -10126,6 +10267,10 @@
             <a:prstDash val="solid"/>
           </a:ln>
         </p:spPr>
+        <p:txBody>
+          <a:bodyPr/>
+          <a:p/>
+        </p:txBody>
       </p:sp>
       <p:sp>
         <p:nvSpPr>
@@ -10206,7 +10351,7 @@
                 <a:ea typeface="Arial" pitchFamily="34" charset="-122"/>
                 <a:cs typeface="Arial" pitchFamily="34" charset="-120"/>
               </a:rPr>
-              <a:t>CALD Victorians may have had fewer opportunities to learn to swim — for reasons of cost, culture, or country-of-origin practice. The drowning data reflects that.</a:t>
+              <a:t>Victorians from multicultural backgrounds may have had fewer opportunities to learn to swim — for reasons of cost, culture, or country-of-origin practice. The drowning data reflects that. LSV reports 58% of fishing-related drowning deaths since 2015–16 were people from multicultural backgrounds.</a:t>
             </a:r>
             <a:endParaRPr lang="en-US" sz="2025" dirty="0"/>
           </a:p>
@@ -10236,6 +10381,10 @@
             <a:prstDash val="solid"/>
           </a:ln>
         </p:spPr>
+        <p:txBody>
+          <a:bodyPr/>
+          <a:p/>
+        </p:txBody>
       </p:sp>
       <p:sp>
         <p:nvSpPr>
@@ -10346,6 +10495,10 @@
             <a:prstDash val="solid"/>
           </a:ln>
         </p:spPr>
+        <p:txBody>
+          <a:bodyPr/>
+          <a:p/>
+        </p:txBody>
       </p:sp>
       <p:sp>
         <p:nvSpPr>
@@ -10456,6 +10609,10 @@
             <a:prstDash val="solid"/>
           </a:ln>
         </p:spPr>
+        <p:txBody>
+          <a:bodyPr/>
+          <a:p/>
+        </p:txBody>
       </p:sp>
       <p:sp>
         <p:nvSpPr>
@@ -10566,6 +10723,10 @@
             <a:prstDash val="solid"/>
           </a:ln>
         </p:spPr>
+        <p:txBody>
+          <a:bodyPr/>
+          <a:p/>
+        </p:txBody>
       </p:sp>
       <p:sp>
         <p:nvSpPr>
@@ -10955,6 +11116,10 @@
           </a:solidFill>
           <a:ln/>
         </p:spPr>
+        <p:txBody>
+          <a:bodyPr/>
+          <a:p/>
+        </p:txBody>
       </p:sp>
       <p:sp>
         <p:nvSpPr>
@@ -11145,6 +11310,10 @@
           </a:solidFill>
           <a:ln/>
         </p:spPr>
+        <p:txBody>
+          <a:bodyPr/>
+          <a:p/>
+        </p:txBody>
       </p:sp>
       <p:sp>
         <p:nvSpPr>
@@ -11335,6 +11504,10 @@
           </a:solidFill>
           <a:ln/>
         </p:spPr>
+        <p:txBody>
+          <a:bodyPr/>
+          <a:p/>
+        </p:txBody>
       </p:sp>
       <p:sp>
         <p:nvSpPr>
@@ -11525,6 +11698,10 @@
           </a:solidFill>
           <a:ln/>
         </p:spPr>
+        <p:txBody>
+          <a:bodyPr/>
+          <a:p/>
+        </p:txBody>
       </p:sp>
       <p:sp>
         <p:nvSpPr>
@@ -11715,6 +11892,10 @@
           </a:solidFill>
           <a:ln/>
         </p:spPr>
+        <p:txBody>
+          <a:bodyPr/>
+          <a:p/>
+        </p:txBody>
       </p:sp>
       <p:sp>
         <p:nvSpPr>
@@ -11905,6 +12086,10 @@
           </a:solidFill>
           <a:ln/>
         </p:spPr>
+        <p:txBody>
+          <a:bodyPr/>
+          <a:p/>
+        </p:txBody>
       </p:sp>
       <p:sp>
         <p:nvSpPr>
@@ -12127,6 +12312,10 @@
           </a:solidFill>
           <a:ln/>
         </p:spPr>
+        <p:txBody>
+          <a:bodyPr/>
+          <a:p/>
+        </p:txBody>
       </p:sp>
       <p:sp>
         <p:nvSpPr>
@@ -12251,7 +12440,7 @@
                 <a:ea typeface="Arial" pitchFamily="34" charset="-122"/>
                 <a:cs typeface="Arial" pitchFamily="34" charset="-120"/>
               </a:rPr>
-              <a:t xml:space="preserve">40% of 2023–24 deaths were CALD community members. Standard curriculum alone is not closing this gap. </a:t>
+              <a:t xml:space="preserve">37% of Victorian drowning deaths since 2015–16 were people from multicultural backgrounds. Standard curriculum alone is not closing this gap. In pairs · propose three specific actions — beyond the standard swim &amp; water safety lessons — that your school could realistically implement.</a:t>
             </a:r>
             <a:pPr algn="l" indent="0" marL="0">
               <a:lnSpc>
@@ -12268,7 +12457,7 @@
                 <a:ea typeface="Arial" pitchFamily="34" charset="-122"/>
                 <a:cs typeface="Arial" pitchFamily="34" charset="-120"/>
               </a:rPr>
-              <a:t xml:space="preserve">In pairs · propose three specific actions </a:t>
+              <a:t xml:space="preserve"/>
             </a:r>
             <a:pPr algn="l" indent="0" marL="0">
               <a:lnSpc>
@@ -12285,7 +12474,7 @@
                 <a:ea typeface="Arial" pitchFamily="34" charset="-122"/>
                 <a:cs typeface="Arial" pitchFamily="34" charset="-120"/>
               </a:rPr>
-              <a:t>— beyond the standard swim &amp; water safety lessons — that your school could realistically implement.</a:t>
+              <a:t/>
             </a:r>
             <a:endParaRPr lang="en-US" sz="2250" dirty="0"/>
           </a:p>
@@ -12310,6 +12499,10 @@
           </a:solidFill>
           <a:ln/>
         </p:spPr>
+        <p:txBody>
+          <a:bodyPr/>
+          <a:p/>
+        </p:txBody>
       </p:sp>
       <p:sp>
         <p:nvSpPr>
@@ -12330,6 +12523,10 @@
           </a:solidFill>
           <a:ln/>
         </p:spPr>
+        <p:txBody>
+          <a:bodyPr/>
+          <a:p/>
+        </p:txBody>
       </p:sp>
       <p:sp>
         <p:nvSpPr>
@@ -12479,6 +12676,10 @@
           </a:solidFill>
           <a:ln/>
         </p:spPr>
+        <p:txBody>
+          <a:bodyPr/>
+          <a:p/>
+        </p:txBody>
       </p:sp>
       <p:sp>
         <p:nvSpPr>
@@ -12499,6 +12700,10 @@
           </a:solidFill>
           <a:ln/>
         </p:spPr>
+        <p:txBody>
+          <a:bodyPr/>
+          <a:p/>
+        </p:txBody>
       </p:sp>
       <p:sp>
         <p:nvSpPr>
@@ -12648,6 +12853,10 @@
           </a:solidFill>
           <a:ln/>
         </p:spPr>
+        <p:txBody>
+          <a:bodyPr/>
+          <a:p/>
+        </p:txBody>
       </p:sp>
       <p:sp>
         <p:nvSpPr>
@@ -12668,6 +12877,10 @@
           </a:solidFill>
           <a:ln/>
         </p:spPr>
+        <p:txBody>
+          <a:bodyPr/>
+          <a:p/>
+        </p:txBody>
       </p:sp>
       <p:sp>
         <p:nvSpPr>
@@ -12931,6 +13144,10 @@
           </a:solidFill>
           <a:ln/>
         </p:spPr>
+        <p:txBody>
+          <a:bodyPr/>
+          <a:p/>
+        </p:txBody>
       </p:sp>
       <p:sp>
         <p:nvSpPr>
@@ -13238,6 +13455,10 @@
           </a:solidFill>
           <a:ln/>
         </p:spPr>
+        <p:txBody>
+          <a:bodyPr/>
+          <a:p/>
+        </p:txBody>
       </p:sp>
       <p:sp>
         <p:nvSpPr>
@@ -13395,6 +13616,10 @@
             <a:prstDash val="solid"/>
           </a:ln>
         </p:spPr>
+        <p:txBody>
+          <a:bodyPr/>
+          <a:p/>
+        </p:txBody>
       </p:sp>
       <p:sp>
         <p:nvSpPr>
@@ -13460,6 +13685,10 @@
             <a:prstDash val="solid"/>
           </a:ln>
         </p:spPr>
+        <p:txBody>
+          <a:bodyPr/>
+          <a:p/>
+        </p:txBody>
       </p:sp>
       <p:sp>
         <p:nvSpPr>
@@ -13525,6 +13754,10 @@
             <a:prstDash val="solid"/>
           </a:ln>
         </p:spPr>
+        <p:txBody>
+          <a:bodyPr/>
+          <a:p/>
+        </p:txBody>
       </p:sp>
       <p:sp>
         <p:nvSpPr>
@@ -13618,6 +13851,10 @@
           </a:solidFill>
           <a:ln/>
         </p:spPr>
+        <p:txBody>
+          <a:bodyPr/>
+          <a:p/>
+        </p:txBody>
       </p:sp>
       <p:sp>
         <p:nvSpPr>
@@ -14122,6 +14359,10 @@
             <a:prstDash val="solid"/>
           </a:ln>
         </p:spPr>
+        <p:txBody>
+          <a:bodyPr/>
+          <a:p/>
+        </p:txBody>
       </p:sp>
       <p:sp>
         <p:nvSpPr>
@@ -14273,6 +14514,10 @@
             <a:prstDash val="solid"/>
           </a:ln>
         </p:spPr>
+        <p:txBody>
+          <a:bodyPr/>
+          <a:p/>
+        </p:txBody>
       </p:sp>
       <p:sp>
         <p:nvSpPr>
@@ -14394,7 +14639,7 @@
                 <a:ea typeface="Arial" pitchFamily="34" charset="-122"/>
                 <a:cs typeface="Arial" pitchFamily="34" charset="-120"/>
               </a:rPr>
-              <a:t>All 54 Victorian 2023–24 drowning deaths were at unpatrolled locations. Where patrols are, deaths aren't.</a:t>
+              <a:t>Zero of the 52 deaths in 2024–25 were in public swimming pools — but 25% were in home environments. Supervision works where it exists.</a:t>
             </a:r>
             <a:endParaRPr lang="en-US" sz="1950" dirty="0"/>
           </a:p>
@@ -14424,6 +14669,10 @@
             <a:prstDash val="solid"/>
           </a:ln>
         </p:spPr>
+        <p:txBody>
+          <a:bodyPr/>
+          <a:p/>
+        </p:txBody>
       </p:sp>
       <p:sp>
         <p:nvSpPr>
@@ -14609,6 +14858,10 @@
             <a:prstDash val="solid"/>
           </a:ln>
         </p:spPr>
+        <p:txBody>
+          <a:bodyPr/>
+          <a:p/>
+        </p:txBody>
       </p:sp>
       <p:sp>
         <p:nvSpPr>
@@ -14760,6 +15013,10 @@
             <a:prstDash val="solid"/>
           </a:ln>
         </p:spPr>
+        <p:txBody>
+          <a:bodyPr/>
+          <a:p/>
+        </p:txBody>
       </p:sp>
       <p:sp>
         <p:nvSpPr>
@@ -14911,6 +15168,10 @@
             <a:prstDash val="solid"/>
           </a:ln>
         </p:spPr>
+        <p:txBody>
+          <a:bodyPr/>
+          <a:p/>
+        </p:txBody>
       </p:sp>
       <p:sp>
         <p:nvSpPr>
@@ -15256,6 +15517,10 @@
           </a:solidFill>
           <a:ln/>
         </p:spPr>
+        <p:txBody>
+          <a:bodyPr/>
+          <a:p/>
+        </p:txBody>
       </p:sp>
       <p:sp>
         <p:nvSpPr>
@@ -15320,6 +15585,10 @@
           </a:solidFill>
           <a:ln/>
         </p:spPr>
+        <p:txBody>
+          <a:bodyPr/>
+          <a:p/>
+        </p:txBody>
       </p:sp>
       <p:sp>
         <p:nvSpPr>
@@ -15384,6 +15653,10 @@
           </a:solidFill>
           <a:ln/>
         </p:spPr>
+        <p:txBody>
+          <a:bodyPr/>
+          <a:p/>
+        </p:txBody>
       </p:sp>
       <p:sp>
         <p:nvSpPr>
@@ -15448,6 +15721,10 @@
           </a:solidFill>
           <a:ln/>
         </p:spPr>
+        <p:txBody>
+          <a:bodyPr/>
+          <a:p/>
+        </p:txBody>
       </p:sp>
       <p:sp>
         <p:nvSpPr>
@@ -15512,6 +15789,10 @@
           </a:solidFill>
           <a:ln/>
         </p:spPr>
+        <p:txBody>
+          <a:bodyPr/>
+          <a:p/>
+        </p:txBody>
       </p:sp>
       <p:sp>
         <p:nvSpPr>
@@ -15576,6 +15857,10 @@
           </a:solidFill>
           <a:ln/>
         </p:spPr>
+        <p:txBody>
+          <a:bodyPr/>
+          <a:p/>
+        </p:txBody>
       </p:sp>
       <p:sp>
         <p:nvSpPr>
@@ -15640,6 +15925,10 @@
           </a:solidFill>
           <a:ln/>
         </p:spPr>
+        <p:txBody>
+          <a:bodyPr/>
+          <a:p/>
+        </p:txBody>
       </p:sp>
       <p:sp>
         <p:nvSpPr>
@@ -15704,6 +15993,10 @@
           </a:solidFill>
           <a:ln/>
         </p:spPr>
+        <p:txBody>
+          <a:bodyPr/>
+          <a:p/>
+        </p:txBody>
       </p:sp>
       <p:sp>
         <p:nvSpPr>
@@ -15768,6 +16061,10 @@
           </a:solidFill>
           <a:ln/>
         </p:spPr>
+        <p:txBody>
+          <a:bodyPr/>
+          <a:p/>
+        </p:txBody>
       </p:sp>
       <p:sp>
         <p:nvSpPr>
@@ -15832,6 +16129,10 @@
           </a:solidFill>
           <a:ln/>
         </p:spPr>
+        <p:txBody>
+          <a:bodyPr/>
+          <a:p/>
+        </p:txBody>
       </p:sp>
       <p:sp>
         <p:nvSpPr>
@@ -15896,6 +16197,10 @@
           </a:solidFill>
           <a:ln/>
         </p:spPr>
+        <p:txBody>
+          <a:bodyPr/>
+          <a:p/>
+        </p:txBody>
       </p:sp>
       <p:sp>
         <p:nvSpPr>
@@ -15960,6 +16265,10 @@
           </a:solidFill>
           <a:ln/>
         </p:spPr>
+        <p:txBody>
+          <a:bodyPr/>
+          <a:p/>
+        </p:txBody>
       </p:sp>
       <p:sp>
         <p:nvSpPr>
@@ -16024,6 +16333,10 @@
           </a:solidFill>
           <a:ln/>
         </p:spPr>
+        <p:txBody>
+          <a:bodyPr/>
+          <a:p/>
+        </p:txBody>
       </p:sp>
       <p:sp>
         <p:nvSpPr>
@@ -16088,6 +16401,10 @@
           </a:solidFill>
           <a:ln/>
         </p:spPr>
+        <p:txBody>
+          <a:bodyPr/>
+          <a:p/>
+        </p:txBody>
       </p:sp>
       <p:sp>
         <p:nvSpPr>
@@ -16152,6 +16469,10 @@
           </a:solidFill>
           <a:ln/>
         </p:spPr>
+        <p:txBody>
+          <a:bodyPr/>
+          <a:p/>
+        </p:txBody>
       </p:sp>
       <p:sp>
         <p:nvSpPr>
@@ -16216,6 +16537,10 @@
           </a:solidFill>
           <a:ln/>
         </p:spPr>
+        <p:txBody>
+          <a:bodyPr/>
+          <a:p/>
+        </p:txBody>
       </p:sp>
       <p:sp>
         <p:nvSpPr>
@@ -16280,6 +16605,10 @@
           </a:solidFill>
           <a:ln/>
         </p:spPr>
+        <p:txBody>
+          <a:bodyPr/>
+          <a:p/>
+        </p:txBody>
       </p:sp>
       <p:sp>
         <p:nvSpPr>
@@ -16344,6 +16673,10 @@
           </a:solidFill>
           <a:ln/>
         </p:spPr>
+        <p:txBody>
+          <a:bodyPr/>
+          <a:p/>
+        </p:txBody>
       </p:sp>
       <p:sp>
         <p:nvSpPr>
@@ -16408,6 +16741,10 @@
           </a:solidFill>
           <a:ln/>
         </p:spPr>
+        <p:txBody>
+          <a:bodyPr/>
+          <a:p/>
+        </p:txBody>
       </p:sp>
       <p:sp>
         <p:nvSpPr>
@@ -16472,6 +16809,10 @@
           </a:solidFill>
           <a:ln/>
         </p:spPr>
+        <p:txBody>
+          <a:bodyPr/>
+          <a:p/>
+        </p:txBody>
       </p:sp>
       <p:sp>
         <p:nvSpPr>
@@ -16536,6 +16877,10 @@
           </a:solidFill>
           <a:ln/>
         </p:spPr>
+        <p:txBody>
+          <a:bodyPr/>
+          <a:p/>
+        </p:txBody>
       </p:sp>
       <p:sp>
         <p:nvSpPr>
@@ -16600,6 +16945,10 @@
           </a:solidFill>
           <a:ln/>
         </p:spPr>
+        <p:txBody>
+          <a:bodyPr/>
+          <a:p/>
+        </p:txBody>
       </p:sp>
       <p:sp>
         <p:nvSpPr>
@@ -16664,6 +17013,10 @@
           </a:solidFill>
           <a:ln/>
         </p:spPr>
+        <p:txBody>
+          <a:bodyPr/>
+          <a:p/>
+        </p:txBody>
       </p:sp>
       <p:sp>
         <p:nvSpPr>
@@ -16703,7 +17056,7 @@
                 <a:ea typeface="Arial" pitchFamily="34" charset="-122"/>
                 <a:cs typeface="Arial" pitchFamily="34" charset="-120"/>
               </a:rPr>
-              <a:t>The 40%-over-represented group</a:t>
+              <a:t>The over-represented group</a:t>
             </a:r>
             <a:endParaRPr lang="en-US" sz="1800" dirty="0"/>
           </a:p>
@@ -16728,6 +17081,10 @@
           </a:solidFill>
           <a:ln/>
         </p:spPr>
+        <p:txBody>
+          <a:bodyPr/>
+          <a:p/>
+        </p:txBody>
       </p:sp>
       <p:sp>
         <p:nvSpPr>
@@ -16792,6 +17149,10 @@
           </a:solidFill>
           <a:ln/>
         </p:spPr>
+        <p:txBody>
+          <a:bodyPr/>
+          <a:p/>
+        </p:txBody>
       </p:sp>
       <p:sp>
         <p:nvSpPr>
@@ -16812,6 +17173,10 @@
           </a:solidFill>
           <a:ln/>
         </p:spPr>
+        <p:txBody>
+          <a:bodyPr/>
+          <a:p/>
+        </p:txBody>
       </p:sp>
       <p:sp>
         <p:nvSpPr>
@@ -17112,6 +17477,10 @@
           </a:solidFill>
           <a:ln/>
         </p:spPr>
+        <p:txBody>
+          <a:bodyPr/>
+          <a:p/>
+        </p:txBody>
       </p:sp>
       <p:sp>
         <p:nvSpPr>
@@ -17132,6 +17501,10 @@
           </a:solidFill>
           <a:ln/>
         </p:spPr>
+        <p:txBody>
+          <a:bodyPr/>
+          <a:p/>
+        </p:txBody>
       </p:sp>
       <p:sp>
         <p:nvSpPr>
@@ -17322,6 +17695,10 @@
           </a:solidFill>
           <a:ln/>
         </p:spPr>
+        <p:txBody>
+          <a:bodyPr/>
+          <a:p/>
+        </p:txBody>
       </p:sp>
       <p:sp>
         <p:nvSpPr>
@@ -17342,6 +17719,10 @@
           </a:solidFill>
           <a:ln/>
         </p:spPr>
+        <p:txBody>
+          <a:bodyPr/>
+          <a:p/>
+        </p:txBody>
       </p:sp>
       <p:sp>
         <p:nvSpPr>
@@ -17532,6 +17913,10 @@
           </a:solidFill>
           <a:ln/>
         </p:spPr>
+        <p:txBody>
+          <a:bodyPr/>
+          <a:p/>
+        </p:txBody>
       </p:sp>
       <p:sp>
         <p:nvSpPr>
@@ -17552,6 +17937,10 @@
           </a:solidFill>
           <a:ln/>
         </p:spPr>
+        <p:txBody>
+          <a:bodyPr/>
+          <a:p/>
+        </p:txBody>
       </p:sp>
       <p:sp>
         <p:nvSpPr>
@@ -17742,6 +18131,10 @@
           </a:solidFill>
           <a:ln/>
         </p:spPr>
+        <p:txBody>
+          <a:bodyPr/>
+          <a:p/>
+        </p:txBody>
       </p:sp>
       <p:sp>
         <p:nvSpPr>
@@ -17762,6 +18155,10 @@
           </a:solidFill>
           <a:ln/>
         </p:spPr>
+        <p:txBody>
+          <a:bodyPr/>
+          <a:p/>
+        </p:txBody>
       </p:sp>
       <p:sp>
         <p:nvSpPr>
@@ -17997,6 +18394,10 @@
           </a:solidFill>
           <a:ln/>
         </p:spPr>
+        <p:txBody>
+          <a:bodyPr/>
+          <a:p/>
+        </p:txBody>
       </p:sp>
       <p:sp>
         <p:nvSpPr>
@@ -18304,6 +18705,10 @@
           </a:solidFill>
           <a:ln/>
         </p:spPr>
+        <p:txBody>
+          <a:bodyPr/>
+          <a:p/>
+        </p:txBody>
       </p:sp>
       <p:sp>
         <p:nvSpPr>
@@ -18461,6 +18866,10 @@
             <a:prstDash val="solid"/>
           </a:ln>
         </p:spPr>
+        <p:txBody>
+          <a:bodyPr/>
+          <a:p/>
+        </p:txBody>
       </p:sp>
       <p:sp>
         <p:nvSpPr>
@@ -18526,6 +18935,10 @@
             <a:prstDash val="solid"/>
           </a:ln>
         </p:spPr>
+        <p:txBody>
+          <a:bodyPr/>
+          <a:p/>
+        </p:txBody>
       </p:sp>
       <p:sp>
         <p:nvSpPr>
@@ -18591,6 +19004,10 @@
             <a:prstDash val="solid"/>
           </a:ln>
         </p:spPr>
+        <p:txBody>
+          <a:bodyPr/>
+          <a:p/>
+        </p:txBody>
       </p:sp>
       <p:sp>
         <p:nvSpPr>
@@ -18656,6 +19073,10 @@
             <a:prstDash val="solid"/>
           </a:ln>
         </p:spPr>
+        <p:txBody>
+          <a:bodyPr/>
+          <a:p/>
+        </p:txBody>
       </p:sp>
       <p:sp>
         <p:nvSpPr>
@@ -18875,6 +19296,10 @@
           </a:solidFill>
           <a:ln/>
         </p:spPr>
+        <p:txBody>
+          <a:bodyPr/>
+          <a:p/>
+        </p:txBody>
       </p:sp>
       <p:sp>
         <p:nvSpPr>
@@ -19041,6 +19466,10 @@
           </a:solidFill>
           <a:ln/>
         </p:spPr>
+        <p:txBody>
+          <a:bodyPr/>
+          <a:p/>
+        </p:txBody>
       </p:sp>
       <p:sp>
         <p:nvSpPr>
@@ -19207,6 +19636,10 @@
           </a:solidFill>
           <a:ln/>
         </p:spPr>
+        <p:txBody>
+          <a:bodyPr/>
+          <a:p/>
+        </p:txBody>
       </p:sp>
       <p:sp>
         <p:nvSpPr>
@@ -19390,6 +19823,10 @@
           </a:solidFill>
           <a:ln/>
         </p:spPr>
+        <p:txBody>
+          <a:bodyPr/>
+          <a:p/>
+        </p:txBody>
       </p:sp>
       <p:sp>
         <p:nvSpPr>
@@ -19607,6 +20044,10 @@
           </a:solidFill>
           <a:ln/>
         </p:spPr>
+        <p:txBody>
+          <a:bodyPr/>
+          <a:p/>
+        </p:txBody>
       </p:sp>
       <p:sp>
         <p:nvSpPr>
@@ -19773,6 +20214,10 @@
           </a:solidFill>
           <a:ln/>
         </p:spPr>
+        <p:txBody>
+          <a:bodyPr/>
+          <a:p/>
+        </p:txBody>
       </p:sp>
       <p:sp>
         <p:nvSpPr>
@@ -20138,6 +20583,10 @@
           </a:solidFill>
           <a:ln/>
         </p:spPr>
+        <p:txBody>
+          <a:bodyPr/>
+          <a:p/>
+        </p:txBody>
       </p:sp>
       <p:sp>
         <p:nvSpPr>
@@ -20343,6 +20792,10 @@
           </a:solidFill>
           <a:ln/>
         </p:spPr>
+        <p:txBody>
+          <a:bodyPr/>
+          <a:p/>
+        </p:txBody>
       </p:sp>
       <p:sp>
         <p:nvSpPr>
@@ -20872,6 +21325,10 @@
           </a:solidFill>
           <a:ln/>
         </p:spPr>
+        <p:txBody>
+          <a:bodyPr/>
+          <a:p/>
+        </p:txBody>
       </p:sp>
       <p:sp>
         <p:nvSpPr>
@@ -20977,6 +21434,10 @@
           </a:solidFill>
           <a:ln/>
         </p:spPr>
+        <p:txBody>
+          <a:bodyPr/>
+          <a:p/>
+        </p:txBody>
       </p:sp>
       <p:sp>
         <p:nvSpPr>
@@ -20997,6 +21458,10 @@
           </a:solidFill>
           <a:ln/>
         </p:spPr>
+        <p:txBody>
+          <a:bodyPr/>
+          <a:p/>
+        </p:txBody>
       </p:sp>
       <p:sp>
         <p:nvSpPr>
@@ -21221,6 +21686,10 @@
           </a:solidFill>
           <a:ln/>
         </p:spPr>
+        <p:txBody>
+          <a:bodyPr/>
+          <a:p/>
+        </p:txBody>
       </p:sp>
       <p:sp>
         <p:nvSpPr>
@@ -21241,6 +21710,10 @@
           </a:solidFill>
           <a:ln/>
         </p:spPr>
+        <p:txBody>
+          <a:bodyPr/>
+          <a:p/>
+        </p:txBody>
       </p:sp>
       <p:sp>
         <p:nvSpPr>
@@ -21448,6 +21921,10 @@
           </a:solidFill>
           <a:ln/>
         </p:spPr>
+        <p:txBody>
+          <a:bodyPr/>
+          <a:p/>
+        </p:txBody>
       </p:sp>
       <p:sp>
         <p:nvSpPr>
@@ -21468,6 +21945,10 @@
           </a:solidFill>
           <a:ln/>
         </p:spPr>
+        <p:txBody>
+          <a:bodyPr/>
+          <a:p/>
+        </p:txBody>
       </p:sp>
       <p:sp>
         <p:nvSpPr>
@@ -21692,6 +22173,10 @@
           </a:solidFill>
           <a:ln/>
         </p:spPr>
+        <p:txBody>
+          <a:bodyPr/>
+          <a:p/>
+        </p:txBody>
       </p:sp>
       <p:sp>
         <p:nvSpPr>
@@ -21994,6 +22479,10 @@
           </a:solidFill>
           <a:ln/>
         </p:spPr>
+        <p:txBody>
+          <a:bodyPr/>
+          <a:p/>
+        </p:txBody>
       </p:sp>
       <p:sp>
         <p:nvSpPr>
@@ -22143,6 +22632,10 @@
           </a:solidFill>
           <a:ln/>
         </p:spPr>
+        <p:txBody>
+          <a:bodyPr/>
+          <a:p/>
+        </p:txBody>
       </p:sp>
       <p:sp>
         <p:nvSpPr>
@@ -22292,6 +22785,10 @@
           </a:solidFill>
           <a:ln/>
         </p:spPr>
+        <p:txBody>
+          <a:bodyPr/>
+          <a:p/>
+        </p:txBody>
       </p:sp>
       <p:sp>
         <p:nvSpPr>
@@ -22441,6 +22938,10 @@
           </a:solidFill>
           <a:ln/>
         </p:spPr>
+        <p:txBody>
+          <a:bodyPr/>
+          <a:p/>
+        </p:txBody>
       </p:sp>
       <p:sp>
         <p:nvSpPr>
@@ -22590,6 +23091,10 @@
           </a:solidFill>
           <a:ln/>
         </p:spPr>
+        <p:txBody>
+          <a:bodyPr/>
+          <a:p/>
+        </p:txBody>
       </p:sp>
       <p:sp>
         <p:nvSpPr>
@@ -22938,6 +23443,10 @@
           </a:solidFill>
           <a:ln/>
         </p:spPr>
+        <p:txBody>
+          <a:bodyPr/>
+          <a:p/>
+        </p:txBody>
       </p:sp>
       <p:sp>
         <p:nvSpPr>
@@ -22958,6 +23467,10 @@
           </a:solidFill>
           <a:ln/>
         </p:spPr>
+        <p:txBody>
+          <a:bodyPr/>
+          <a:p/>
+        </p:txBody>
       </p:sp>
       <p:sp>
         <p:nvSpPr>
@@ -23124,6 +23637,10 @@
           </a:solidFill>
           <a:ln/>
         </p:spPr>
+        <p:txBody>
+          <a:bodyPr/>
+          <a:p/>
+        </p:txBody>
       </p:sp>
       <p:sp>
         <p:nvSpPr>
@@ -23144,6 +23661,10 @@
           </a:solidFill>
           <a:ln/>
         </p:spPr>
+        <p:txBody>
+          <a:bodyPr/>
+          <a:p/>
+        </p:txBody>
       </p:sp>
       <p:sp>
         <p:nvSpPr>
@@ -23310,6 +23831,10 @@
           </a:solidFill>
           <a:ln/>
         </p:spPr>
+        <p:txBody>
+          <a:bodyPr/>
+          <a:p/>
+        </p:txBody>
       </p:sp>
       <p:sp>
         <p:nvSpPr>
@@ -23330,6 +23855,10 @@
           </a:solidFill>
           <a:ln/>
         </p:spPr>
+        <p:txBody>
+          <a:bodyPr/>
+          <a:p/>
+        </p:txBody>
       </p:sp>
       <p:sp>
         <p:nvSpPr>
@@ -23496,6 +24025,10 @@
           </a:solidFill>
           <a:ln/>
         </p:spPr>
+        <p:txBody>
+          <a:bodyPr/>
+          <a:p/>
+        </p:txBody>
       </p:sp>
       <p:sp>
         <p:nvSpPr>
@@ -23516,6 +24049,10 @@
           </a:solidFill>
           <a:ln/>
         </p:spPr>
+        <p:txBody>
+          <a:bodyPr/>
+          <a:p/>
+        </p:txBody>
       </p:sp>
       <p:sp>
         <p:nvSpPr>
@@ -23682,6 +24219,10 @@
           </a:solidFill>
           <a:ln/>
         </p:spPr>
+        <p:txBody>
+          <a:bodyPr/>
+          <a:p/>
+        </p:txBody>
       </p:sp>
       <p:sp>
         <p:nvSpPr>
@@ -23702,6 +24243,10 @@
           </a:solidFill>
           <a:ln/>
         </p:spPr>
+        <p:txBody>
+          <a:bodyPr/>
+          <a:p/>
+        </p:txBody>
       </p:sp>
       <p:sp>
         <p:nvSpPr>
@@ -23868,6 +24413,10 @@
           </a:solidFill>
           <a:ln/>
         </p:spPr>
+        <p:txBody>
+          <a:bodyPr/>
+          <a:p/>
+        </p:txBody>
       </p:sp>
       <p:sp>
         <p:nvSpPr>
@@ -23888,6 +24437,10 @@
           </a:solidFill>
           <a:ln/>
         </p:spPr>
+        <p:txBody>
+          <a:bodyPr/>
+          <a:p/>
+        </p:txBody>
       </p:sp>
       <p:sp>
         <p:nvSpPr>
@@ -24168,6 +24721,10 @@
           </a:solidFill>
           <a:ln/>
         </p:spPr>
+        <p:txBody>
+          <a:bodyPr/>
+          <a:p/>
+        </p:txBody>
       </p:sp>
       <p:sp>
         <p:nvSpPr>
@@ -24473,6 +25030,10 @@
           </a:solidFill>
           <a:ln/>
         </p:spPr>
+        <p:txBody>
+          <a:bodyPr/>
+          <a:p/>
+        </p:txBody>
       </p:sp>
       <p:sp>
         <p:nvSpPr>
@@ -24814,6 +25375,10 @@
           </a:solidFill>
           <a:ln/>
         </p:spPr>
+        <p:txBody>
+          <a:bodyPr/>
+          <a:p/>
+        </p:txBody>
       </p:sp>
       <p:sp>
         <p:nvSpPr>
@@ -24971,6 +25536,10 @@
             <a:prstDash val="solid"/>
           </a:ln>
         </p:spPr>
+        <p:txBody>
+          <a:bodyPr/>
+          <a:p/>
+        </p:txBody>
       </p:sp>
       <p:sp>
         <p:nvSpPr>
@@ -25036,6 +25605,10 @@
             <a:prstDash val="solid"/>
           </a:ln>
         </p:spPr>
+        <p:txBody>
+          <a:bodyPr/>
+          <a:p/>
+        </p:txBody>
       </p:sp>
       <p:sp>
         <p:nvSpPr>
@@ -25101,6 +25674,10 @@
             <a:prstDash val="solid"/>
           </a:ln>
         </p:spPr>
+        <p:txBody>
+          <a:bodyPr/>
+          <a:p/>
+        </p:txBody>
       </p:sp>
       <p:sp>
         <p:nvSpPr>
@@ -25279,6 +25856,10 @@
           </a:solidFill>
           <a:ln/>
         </p:spPr>
+        <p:txBody>
+          <a:bodyPr/>
+          <a:p/>
+        </p:txBody>
       </p:sp>
       <p:sp>
         <p:nvSpPr>
@@ -25299,6 +25880,10 @@
           </a:solidFill>
           <a:ln/>
         </p:spPr>
+        <p:txBody>
+          <a:bodyPr/>
+          <a:p/>
+        </p:txBody>
       </p:sp>
       <p:sp>
         <p:nvSpPr>
@@ -25448,6 +26033,10 @@
           </a:solidFill>
           <a:ln/>
         </p:spPr>
+        <p:txBody>
+          <a:bodyPr/>
+          <a:p/>
+        </p:txBody>
       </p:sp>
       <p:sp>
         <p:nvSpPr>
@@ -25509,6 +26098,10 @@
           </a:solidFill>
           <a:ln/>
         </p:spPr>
+        <p:txBody>
+          <a:bodyPr/>
+          <a:p/>
+        </p:txBody>
       </p:sp>
       <p:sp>
         <p:nvSpPr>
@@ -25529,6 +26122,10 @@
           </a:solidFill>
           <a:ln/>
         </p:spPr>
+        <p:txBody>
+          <a:bodyPr/>
+          <a:p/>
+        </p:txBody>
       </p:sp>
       <p:sp>
         <p:nvSpPr>
@@ -25678,6 +26275,10 @@
           </a:solidFill>
           <a:ln/>
         </p:spPr>
+        <p:txBody>
+          <a:bodyPr/>
+          <a:p/>
+        </p:txBody>
       </p:sp>
       <p:sp>
         <p:nvSpPr>
@@ -25739,6 +26340,10 @@
           </a:solidFill>
           <a:ln/>
         </p:spPr>
+        <p:txBody>
+          <a:bodyPr/>
+          <a:p/>
+        </p:txBody>
       </p:sp>
       <p:sp>
         <p:nvSpPr>
@@ -25759,6 +26364,10 @@
           </a:solidFill>
           <a:ln/>
         </p:spPr>
+        <p:txBody>
+          <a:bodyPr/>
+          <a:p/>
+        </p:txBody>
       </p:sp>
       <p:sp>
         <p:nvSpPr>
@@ -25912,6 +26521,10 @@
           </a:solidFill>
           <a:ln/>
         </p:spPr>
+        <p:txBody>
+          <a:bodyPr/>
+          <a:p/>
+        </p:txBody>
       </p:sp>
       <p:sp>
         <p:nvSpPr>
@@ -25975,6 +26588,10 @@
           </a:solidFill>
           <a:ln/>
         </p:spPr>
+        <p:txBody>
+          <a:bodyPr/>
+          <a:p/>
+        </p:txBody>
       </p:sp>
       <p:sp>
         <p:nvSpPr>
@@ -25995,6 +26612,10 @@
           </a:solidFill>
           <a:ln/>
         </p:spPr>
+        <p:txBody>
+          <a:bodyPr/>
+          <a:p/>
+        </p:txBody>
       </p:sp>
       <p:sp>
         <p:nvSpPr>
@@ -26278,6 +26899,10 @@
           </a:solidFill>
           <a:ln/>
         </p:spPr>
+        <p:txBody>
+          <a:bodyPr/>
+          <a:p/>
+        </p:txBody>
       </p:sp>
       <p:sp>
         <p:nvSpPr>
@@ -26427,6 +27052,10 @@
           </a:solidFill>
           <a:ln/>
         </p:spPr>
+        <p:txBody>
+          <a:bodyPr/>
+          <a:p/>
+        </p:txBody>
       </p:sp>
       <p:sp>
         <p:nvSpPr>
@@ -26576,6 +27205,10 @@
           </a:solidFill>
           <a:ln/>
         </p:spPr>
+        <p:txBody>
+          <a:bodyPr/>
+          <a:p/>
+        </p:txBody>
       </p:sp>
       <p:sp>
         <p:nvSpPr>
@@ -26725,6 +27358,10 @@
           </a:solidFill>
           <a:ln/>
         </p:spPr>
+        <p:txBody>
+          <a:bodyPr/>
+          <a:p/>
+        </p:txBody>
       </p:sp>
       <p:sp>
         <p:nvSpPr>
@@ -26874,6 +27511,10 @@
           </a:solidFill>
           <a:ln/>
         </p:spPr>
+        <p:txBody>
+          <a:bodyPr/>
+          <a:p/>
+        </p:txBody>
       </p:sp>
       <p:sp>
         <p:nvSpPr>
@@ -27023,6 +27664,10 @@
           </a:solidFill>
           <a:ln/>
         </p:spPr>
+        <p:txBody>
+          <a:bodyPr/>
+          <a:p/>
+        </p:txBody>
       </p:sp>
       <p:sp>
         <p:nvSpPr>
@@ -28360,6 +29005,10 @@
           </a:solidFill>
           <a:ln/>
         </p:spPr>
+        <p:txBody>
+          <a:bodyPr/>
+          <a:p/>
+        </p:txBody>
       </p:sp>
       <p:sp>
         <p:nvSpPr>
@@ -28488,7 +29137,7 @@
                 <a:ea typeface="Arial" pitchFamily="34" charset="-122"/>
                 <a:cs typeface="Arial" pitchFamily="34" charset="-120"/>
               </a:rPr>
-              <a:t>54 Victorian deaths · 2023–24</a:t>
+              <a:t>52 Victorian deaths · 2024–25</a:t>
             </a:r>
             <a:endParaRPr lang="en-US" sz="1800" dirty="0"/>
           </a:p>
@@ -28512,7 +29161,7 @@
                 <a:ea typeface="Arial" pitchFamily="34" charset="-122"/>
                 <a:cs typeface="Arial" pitchFamily="34" charset="-120"/>
               </a:rPr>
-              <a:t>Non-fatals 60% above 10-yr avg</a:t>
+              <a:t>Non-fatals 37% above 10-yr avg</a:t>
             </a:r>
             <a:endParaRPr lang="en-US" sz="1800" dirty="0"/>
           </a:p>
@@ -28536,7 +29185,7 @@
                 <a:ea typeface="Arial" pitchFamily="34" charset="-122"/>
                 <a:cs typeface="Arial" pitchFamily="34" charset="-120"/>
               </a:rPr>
-              <a:t>~40% CALD over-representation</a:t>
+              <a:t>37% multicultural over-representation</a:t>
             </a:r>
             <a:endParaRPr lang="en-US" sz="1800" dirty="0"/>
           </a:p>
@@ -28585,6 +29234,10 @@
           </a:solidFill>
           <a:ln/>
         </p:spPr>
+        <p:txBody>
+          <a:bodyPr/>
+          <a:p/>
+        </p:txBody>
       </p:sp>
       <p:sp>
         <p:nvSpPr>
@@ -28810,6 +29463,10 @@
           </a:solidFill>
           <a:ln/>
         </p:spPr>
+        <p:txBody>
+          <a:bodyPr/>
+          <a:p/>
+        </p:txBody>
       </p:sp>
       <p:sp>
         <p:nvSpPr>
@@ -29138,6 +29795,10 @@
           </a:solidFill>
           <a:ln/>
         </p:spPr>
+        <p:txBody>
+          <a:bodyPr/>
+          <a:p/>
+        </p:txBody>
       </p:sp>
       <p:sp>
         <p:nvSpPr>
@@ -29363,6 +30024,10 @@
           </a:solidFill>
           <a:ln/>
         </p:spPr>
+        <p:txBody>
+          <a:bodyPr/>
+          <a:p/>
+        </p:txBody>
       </p:sp>
       <p:sp>
         <p:nvSpPr>
@@ -29588,6 +30253,10 @@
           </a:solidFill>
           <a:ln/>
         </p:spPr>
+        <p:txBody>
+          <a:bodyPr/>
+          <a:p/>
+        </p:txBody>
       </p:sp>
       <p:sp>
         <p:nvSpPr>
@@ -29927,6 +30596,10 @@
           </a:solidFill>
           <a:ln/>
         </p:spPr>
+        <p:txBody>
+          <a:bodyPr/>
+          <a:p/>
+        </p:txBody>
       </p:sp>
       <p:sp>
         <p:nvSpPr>
@@ -30084,6 +30757,10 @@
             <a:prstDash val="solid"/>
           </a:ln>
         </p:spPr>
+        <p:txBody>
+          <a:bodyPr/>
+          <a:p/>
+        </p:txBody>
       </p:sp>
       <p:sp>
         <p:nvSpPr>
@@ -30149,6 +30826,10 @@
             <a:prstDash val="solid"/>
           </a:ln>
         </p:spPr>
+        <p:txBody>
+          <a:bodyPr/>
+          <a:p/>
+        </p:txBody>
       </p:sp>
       <p:sp>
         <p:nvSpPr>
@@ -30214,6 +30895,10 @@
             <a:prstDash val="solid"/>
           </a:ln>
         </p:spPr>
+        <p:txBody>
+          <a:bodyPr/>
+          <a:p/>
+        </p:txBody>
       </p:sp>
       <p:sp>
         <p:nvSpPr>
@@ -30253,6 +30938,212 @@
               <a:t>CLASSROOM · INDIVIDUAL + PAIRS</a:t>
             </a:r>
             <a:endParaRPr lang="en-US" sz="1800" dirty="0"/>
+          </a:p>
+        </p:txBody>
+      </p:sp>
+    </p:spTree>
+  </p:cSld>
+  <p:clrMapOvr>
+    <a:masterClrMapping/>
+  </p:clrMapOvr>
+</p:sld>
+</file>
+
+<file path=ppt/slides/slide40.xml><?xml version="1.0" encoding="utf-8"?>
+<p:sld xmlns:a="http://schemas.openxmlformats.org/drawingml/2006/main" xmlns:p="http://schemas.openxmlformats.org/presentationml/2006/main" xmlns:r="http://schemas.openxmlformats.org/officeDocument/2006/relationships">
+  <p:cSld>
+    <p:spTree>
+      <p:nvGrpSpPr>
+        <p:cNvPr id="1" name=""/>
+        <p:cNvGrpSpPr/>
+        <p:nvPr/>
+      </p:nvGrpSpPr>
+      <p:grpSpPr/>
+      <p:sp>
+        <p:nvSpPr>
+          <p:cNvPr id="2" name="TextBox 1"/>
+          <p:cNvSpPr txBox="1"/>
+          <p:nvPr/>
+        </p:nvSpPr>
+        <p:spPr>
+          <a:xfrm>
+            <a:off x="640080" y="640080"/>
+            <a:ext cx="17007840" cy="9006840"/>
+          </a:xfrm>
+          <a:prstGeom prst="rect">
+            <a:avLst/>
+          </a:prstGeom>
+          <a:noFill/>
+        </p:spPr>
+        <p:txBody>
+          <a:bodyPr wrap="square">
+            <a:spAutoFit/>
+          </a:bodyPr>
+          <a:lstStyle/>
+          <a:p>
+            <a:pPr>
+              <a:spcAft>
+                <a:spcPts val="1400"/>
+              </a:spcAft>
+            </a:pPr>
+            <a:r>
+              <a:rPr sz="2600" b="1">
+                <a:solidFill>
+                  <a:srgbClr val="0A1E3D"/>
+                </a:solidFill>
+              </a:rPr>
+              <a:t>Licence &amp; Attribution</a:t>
+            </a:r>
+          </a:p>
+          <a:p>
+            <a:pPr>
+              <a:spcAft>
+                <a:spcPts val="1000"/>
+              </a:spcAft>
+            </a:pPr>
+            <a:r>
+              <a:rPr sz="1400" b="1">
+                <a:solidFill>
+                  <a:srgbClr val="1565C0"/>
+                </a:solidFill>
+              </a:rPr>
+              <a:t>© 2026 Emilie Harrison — Swim &amp; Water Safety Teaching Hub</a:t>
+            </a:r>
+          </a:p>
+          <a:p>
+            <a:pPr>
+              <a:spcAft>
+                <a:spcPts val="1000"/>
+              </a:spcAft>
+            </a:pPr>
+            <a:r>
+              <a:rPr sz="1200" b="0">
+                <a:solidFill>
+                  <a:srgbClr val="1A2840"/>
+                </a:solidFill>
+              </a:rPr>
+              <a:t>Licensed under Creative Commons Attribution 4.0 International (CC BY 4.0). You are free to copy, adapt, remix and redistribute this deck — including commercially — provided you credit the author and indicate any changes.</a:t>
+            </a:r>
+          </a:p>
+          <a:p>
+            <a:pPr>
+              <a:spcAft>
+                <a:spcPts val="1000"/>
+              </a:spcAft>
+            </a:pPr>
+            <a:r>
+              <a:rPr sz="1100" b="0">
+                <a:solidFill>
+                  <a:srgbClr val="5A6E8A"/>
+                </a:solidFill>
+              </a:rPr>
+              <a:t>Attribution: "Swim &amp; Water Safety Teaching Hub" by Emilie Harrison, CC BY 4.0. Source: emilie-harrison.github.io/swim-water-safety</a:t>
+            </a:r>
+          </a:p>
+          <a:p>
+            <a:pPr>
+              <a:spcAft>
+                <a:spcPts val="1000"/>
+              </a:spcAft>
+            </a:pPr>
+            <a:r>
+              <a:rPr sz="1100" b="0">
+                <a:solidFill>
+                  <a:srgbClr val="5A6E8A"/>
+                </a:solidFill>
+              </a:rPr>
+              <a:t>Third-party material is not covered by this licence. Content owned by Life Saving Victoria, Royal Life Saving Australia, Surf Life Saving Australia, VCAA, ACARA, AIATSIS and the Australian Resuscitation Council — including drowning data, clinical guidelines, curriculum content, logos and program names — remains with its owners.</a:t>
+            </a:r>
+          </a:p>
+          <a:p>
+            <a:pPr>
+              <a:spcAft>
+                <a:spcPts val="1000"/>
+              </a:spcAft>
+            </a:pPr>
+            <a:r>
+              <a:rPr sz="1000" b="0">
+                <a:solidFill>
+                  <a:srgbClr val="5A6E8A"/>
+                </a:solidFill>
+              </a:rPr>
+              <a:t>Statistics: Life Saving Victoria, Victorian Drowning Report 2024–25. Deck updated September 2026.</a:t>
+            </a:r>
+          </a:p>
+          <a:p>
+            <a:pPr>
+              <a:spcAft>
+                <a:spcPts val="300"/>
+              </a:spcAft>
+            </a:pPr>
+            <a:r>
+              <a:rPr sz="1000">
+                <a:solidFill>
+                  <a:srgbClr val="5A6E8A"/>
+                </a:solidFill>
+              </a:rPr>
+              <a:t>Data sources cited in this deck — retain these citations if you adapt it:</a:t>
+            </a:r>
+          </a:p>
+          <a:p>
+            <a:pPr>
+              <a:spcAft>
+                <a:spcPts val="300"/>
+              </a:spcAft>
+            </a:pPr>
+            <a:r>
+              <a:rPr sz="1000">
+                <a:solidFill>
+                  <a:srgbClr val="5A6E8A"/>
+                </a:solidFill>
+              </a:rPr>
+              <a:t>• Life Saving Victoria. (2025). Victorian Drowning Report 2024–25. Life Saving Victoria: Melbourne.</a:t>
+            </a:r>
+          </a:p>
+          <a:p>
+            <a:pPr>
+              <a:spcAft>
+                <a:spcPts val="300"/>
+              </a:spcAft>
+            </a:pPr>
+            <a:r>
+              <a:rPr sz="1000">
+                <a:solidFill>
+                  <a:srgbClr val="5A6E8A"/>
+                </a:solidFill>
+              </a:rPr>
+              <a:t>• Royal Life Saving Australia (2026). National Drowning Report 2026. RLSSA: Sydney.</a:t>
+            </a:r>
+          </a:p>
+          <a:p>
+            <a:pPr>
+              <a:spcAft>
+                <a:spcPts val="300"/>
+              </a:spcAft>
+            </a:pPr>
+            <a:r>
+              <a:rPr sz="1000">
+                <a:solidFill>
+                  <a:srgbClr val="5A6E8A"/>
+                </a:solidFill>
+              </a:rPr>
+              <a:t>• Surf Life Saving Australia (2026). Summer Coastal Drowning Report 2025/26. SLSA: Sydney.</a:t>
+            </a:r>
+          </a:p>
+          <a:p>
+            <a:pPr>
+              <a:spcAft>
+                <a:spcPts val="300"/>
+              </a:spcAft>
+            </a:pPr>
+            <a:r>
+              <a:rPr sz="1000">
+                <a:solidFill>
+                  <a:srgbClr val="5A6E8A"/>
+                </a:solidFill>
+              </a:rPr>
+              <a:t>These figures remain the property of the publishing organisations.</a:t>
+            </a:r>
           </a:p>
         </p:txBody>
       </p:sp>
@@ -30307,6 +31198,10 @@
           </a:solidFill>
           <a:ln/>
         </p:spPr>
+        <p:txBody>
+          <a:bodyPr/>
+          <a:p/>
+        </p:txBody>
       </p:sp>
       <p:sp>
         <p:nvSpPr>
@@ -30517,7 +31412,7 @@
                 <a:ea typeface="Courier New" pitchFamily="34" charset="-122"/>
                 <a:cs typeface="Courier New" pitchFamily="34" charset="-120"/>
               </a:rPr>
-              <a:t>SOURCE · LSV VICTORIAN DROWNING REPORT 2023–24</a:t>
+              <a:t>SOURCE · LSV VICTORIAN DROWNING REPORT 2024–25</a:t>
             </a:r>
             <a:endParaRPr lang="en-US" sz="1800" dirty="0"/>
           </a:p>
@@ -30590,7 +31485,7 @@
                 <a:ea typeface="Courier New" pitchFamily="34" charset="-122"/>
                 <a:cs typeface="Courier New" pitchFamily="34" charset="-120"/>
               </a:rPr>
-              <a:t>VICTORIA · 2023–24 · LIFE SAVING VICTORIA REPORT</a:t>
+              <a:t>VICTORIA · 2024–25 · LIFE SAVING VICTORIA REPORT</a:t>
             </a:r>
             <a:endParaRPr lang="en-US" sz="1800" dirty="0"/>
           </a:p>
@@ -30700,6 +31595,10 @@
           </a:solidFill>
           <a:ln/>
         </p:spPr>
+        <p:txBody>
+          <a:bodyPr/>
+          <a:p/>
+        </p:txBody>
       </p:sp>
       <p:sp>
         <p:nvSpPr>
@@ -30739,7 +31638,7 @@
                 <a:ea typeface="Arial" pitchFamily="34" charset="-122"/>
                 <a:cs typeface="Arial" pitchFamily="34" charset="-120"/>
               </a:rPr>
-              <a:t>54</a:t>
+              <a:t>52</a:t>
             </a:r>
             <a:endParaRPr lang="en-US" sz="15000" dirty="0"/>
           </a:p>
@@ -30849,6 +31748,10 @@
           </a:solidFill>
           <a:ln/>
         </p:spPr>
+        <p:txBody>
+          <a:bodyPr/>
+          <a:p/>
+        </p:txBody>
       </p:sp>
       <p:sp>
         <p:nvSpPr>
@@ -30990,7 +31893,7 @@
                 <a:ea typeface="Courier New" pitchFamily="34" charset="-122"/>
                 <a:cs typeface="Courier New" pitchFamily="34" charset="-120"/>
               </a:rPr>
-              <a:t>CALD COMMUNITIES</a:t>
+              <a:t>MULTICULTURAL COMMUNITIES</a:t>
             </a:r>
             <a:endParaRPr lang="en-US" sz="1800" dirty="0"/>
           </a:p>
@@ -31015,6 +31918,10 @@
           </a:solidFill>
           <a:ln/>
         </p:spPr>
+        <p:txBody>
+          <a:bodyPr/>
+          <a:p/>
+        </p:txBody>
       </p:sp>
       <p:sp>
         <p:nvSpPr>
@@ -31054,7 +31961,7 @@
                 <a:ea typeface="Arial" pitchFamily="34" charset="-122"/>
                 <a:cs typeface="Arial" pitchFamily="34" charset="-120"/>
               </a:rPr>
-              <a:t>~40</a:t>
+              <a:t>37%</a:t>
             </a:r>
             <a:pPr algn="l" indent="0" marL="0">
               <a:lnSpc>
@@ -31071,7 +31978,7 @@
                 <a:ea typeface="Arial" pitchFamily="34" charset="-122"/>
                 <a:cs typeface="Arial" pitchFamily="34" charset="-120"/>
               </a:rPr>
-              <a:t>%</a:t>
+              <a:t/>
             </a:r>
             <a:endParaRPr lang="en-US" sz="15000" dirty="0"/>
           </a:p>
@@ -31181,6 +32088,10 @@
           </a:solidFill>
           <a:ln/>
         </p:spPr>
+        <p:txBody>
+          <a:bodyPr/>
+          <a:p/>
+        </p:txBody>
       </p:sp>
       <p:sp>
         <p:nvSpPr>
@@ -31264,7 +32175,7 @@
                 <a:ea typeface="Arial" pitchFamily="34" charset="-122"/>
                 <a:cs typeface="Arial" pitchFamily="34" charset="-120"/>
               </a:rPr>
-              <a:t>Zero of the 54 deaths occurred between the flags at a patrolled location.</a:t>
+              <a:t>Zero of the 52 deaths occurred in a public swimming pool — first time since 2019–20.</a:t>
             </a:r>
             <a:endParaRPr lang="en-US" sz="1950" dirty="0"/>
           </a:p>
@@ -31403,6 +32314,10 @@
           </a:solidFill>
           <a:ln/>
         </p:spPr>
+        <p:txBody>
+          <a:bodyPr/>
+          <a:p/>
+        </p:txBody>
       </p:sp>
       <p:sp>
         <p:nvSpPr>
@@ -31485,7 +32400,7 @@
                 <a:ea typeface="Arial" pitchFamily="34" charset="-122"/>
                 <a:cs typeface="Arial" pitchFamily="34" charset="-120"/>
               </a:rPr>
-              <a:t>40</a:t>
+              <a:t>37%</a:t>
             </a:r>
             <a:pPr algn="l" indent="0" marL="0">
               <a:lnSpc>
@@ -31502,7 +32417,7 @@
                 <a:ea typeface="Arial" pitchFamily="34" charset="-122"/>
                 <a:cs typeface="Arial" pitchFamily="34" charset="-120"/>
               </a:rPr>
-              <a:t>%</a:t>
+              <a:t/>
             </a:r>
             <a:endParaRPr lang="en-US" sz="36000" dirty="0"/>
           </a:p>
@@ -31546,7 +32461,7 @@
                 <a:ea typeface="Arial" pitchFamily="34" charset="-122"/>
                 <a:cs typeface="Arial" pitchFamily="34" charset="-120"/>
               </a:rPr>
-              <a:t xml:space="preserve">of Victorian drowning deaths in 2023–24 were people from </a:t>
+              <a:t xml:space="preserve">of Victorian drowning deaths since 2015–16 were people from multicultural backgrounds — 185 deaths. Country of birth was unknown in a further 22% of cases, so 37% is a lower bound.</a:t>
             </a:r>
             <a:pPr algn="l" indent="0" marL="0">
               <a:lnSpc>
@@ -31563,7 +32478,7 @@
                 <a:ea typeface="Arial" pitchFamily="34" charset="-122"/>
                 <a:cs typeface="Arial" pitchFamily="34" charset="-120"/>
               </a:rPr>
-              <a:t xml:space="preserve">Culturally &amp; Linguistically Diverse </a:t>
+              <a:t xml:space="preserve"/>
             </a:r>
             <a:pPr algn="l" indent="0" marL="0">
               <a:lnSpc>
@@ -31580,7 +32495,7 @@
                 <a:ea typeface="Arial" pitchFamily="34" charset="-122"/>
                 <a:cs typeface="Arial" pitchFamily="34" charset="-120"/>
               </a:rPr>
-              <a:t>communities — despite CALD Victorians making up roughly half that share of the state's population.</a:t>
+              <a:t/>
             </a:r>
             <a:endParaRPr lang="en-US" sz="2850" dirty="0"/>
           </a:p>
@@ -31788,7 +32703,7 @@
                 <a:ea typeface="Courier New" pitchFamily="34" charset="-122"/>
                 <a:cs typeface="Courier New" pitchFamily="34" charset="-120"/>
               </a:rPr>
-              <a:t>SOURCE · LSV VICTORIAN DROWNING REPORT 2023–24</a:t>
+              <a:t>SOURCE · LSV VICTORIAN DROWNING REPORT 2024–25</a:t>
             </a:r>
             <a:endParaRPr lang="en-US" sz="1800" dirty="0"/>
           </a:p>
@@ -31930,6 +32845,10 @@
           </a:solidFill>
           <a:ln/>
         </p:spPr>
+        <p:txBody>
+          <a:bodyPr/>
+          <a:p/>
+        </p:txBody>
       </p:sp>
       <p:sp>
         <p:nvSpPr>
@@ -31950,6 +32869,10 @@
           </a:solidFill>
           <a:ln/>
         </p:spPr>
+        <p:txBody>
+          <a:bodyPr/>
+          <a:p/>
+        </p:txBody>
       </p:sp>
       <p:sp>
         <p:nvSpPr>
@@ -31970,6 +32893,10 @@
           </a:solidFill>
           <a:ln/>
         </p:spPr>
+        <p:txBody>
+          <a:bodyPr/>
+          <a:p/>
+        </p:txBody>
       </p:sp>
       <p:sp>
         <p:nvSpPr>
@@ -31990,6 +32917,10 @@
           </a:solidFill>
           <a:ln/>
         </p:spPr>
+        <p:txBody>
+          <a:bodyPr/>
+          <a:p/>
+        </p:txBody>
       </p:sp>
       <p:sp>
         <p:nvSpPr>
@@ -32010,6 +32941,10 @@
           </a:solidFill>
           <a:ln/>
         </p:spPr>
+        <p:txBody>
+          <a:bodyPr/>
+          <a:p/>
+        </p:txBody>
       </p:sp>
       <p:sp>
         <p:nvSpPr>
@@ -32046,7 +32981,7 @@
                 <a:ea typeface="Courier New" pitchFamily="34" charset="-122"/>
                 <a:cs typeface="Courier New" pitchFamily="34" charset="-120"/>
               </a:rPr>
-              <a:t>VICTORIA · 2023–24</a:t>
+              <a:t>VICTORIA · 2024–25</a:t>
             </a:r>
             <a:endParaRPr lang="en-US" sz="1800" dirty="0"/>
           </a:p>
@@ -32087,7 +33022,7 @@
                 <a:ea typeface="Courier New" pitchFamily="34" charset="-122"/>
                 <a:cs typeface="Courier New" pitchFamily="34" charset="-120"/>
               </a:rPr>
-              <a:t>54 ÷ 6,900,000 × 100,000</a:t>
+              <a:t>52 ÷ 6,900,000 × 100,000</a:t>
             </a:r>
             <a:endParaRPr lang="en-US" sz="2100" dirty="0"/>
           </a:p>
@@ -32131,7 +33066,7 @@
                 <a:ea typeface="Arial" pitchFamily="34" charset="-122"/>
                 <a:cs typeface="Arial" pitchFamily="34" charset="-120"/>
               </a:rPr>
-              <a:t>0.78</a:t>
+              <a:t>0.75</a:t>
             </a:r>
             <a:endParaRPr lang="en-US" sz="7500" dirty="0"/>
           </a:p>
@@ -32175,7 +33110,7 @@
                 <a:ea typeface="Arial" pitchFamily="34" charset="-122"/>
                 <a:cs typeface="Arial" pitchFamily="34" charset="-120"/>
               </a:rPr>
-              <a:t>per 100,000 people · LSV 2023–24</a:t>
+              <a:t>per 100,000 people · LSV 2024–25</a:t>
             </a:r>
             <a:endParaRPr lang="en-US" sz="1950" dirty="0"/>
           </a:p>
@@ -32205,6 +33140,10 @@
             <a:prstDash val="solid"/>
           </a:ln>
         </p:spPr>
+        <p:txBody>
+          <a:bodyPr/>
+          <a:p/>
+        </p:txBody>
       </p:sp>
       <p:sp>
         <p:nvSpPr>
@@ -32400,6 +33339,10 @@
             <a:prstDash val="solid"/>
           </a:ln>
         </p:spPr>
+        <p:txBody>
+          <a:bodyPr/>
+          <a:p/>
+        </p:txBody>
       </p:sp>
       <p:sp>
         <p:nvSpPr>
@@ -32590,6 +33533,10 @@
           </a:solidFill>
           <a:ln/>
         </p:spPr>
+        <p:txBody>
+          <a:bodyPr/>
+          <a:p/>
+        </p:txBody>
       </p:sp>
       <p:sp>
         <p:nvSpPr>
@@ -32610,6 +33557,10 @@
           </a:solidFill>
           <a:ln/>
         </p:spPr>
+        <p:txBody>
+          <a:bodyPr/>
+          <a:p/>
+        </p:txBody>
       </p:sp>
       <p:sp>
         <p:nvSpPr>
@@ -32988,6 +33939,10 @@
           </a:solidFill>
           <a:ln/>
         </p:spPr>
+        <p:txBody>
+          <a:bodyPr/>
+          <a:p/>
+        </p:txBody>
       </p:sp>
       <p:sp>
         <p:nvSpPr>
@@ -33071,7 +34026,7 @@
                 <a:ea typeface="Arial" pitchFamily="34" charset="-122"/>
                 <a:cs typeface="Arial" pitchFamily="34" charset="-120"/>
               </a:rPr>
-              <a:t>An estimated 320,000 people drown each year worldwide (WHO).</a:t>
+              <a:t>Around 300,000 people drown each year worldwide; 92% in low- and middle-income countries (WHO, 2024).</a:t>
             </a:r>
             <a:endParaRPr lang="en-US" sz="1950" dirty="0"/>
           </a:p>
@@ -33137,6 +34092,10 @@
           </a:solidFill>
           <a:ln/>
         </p:spPr>
+        <p:txBody>
+          <a:bodyPr/>
+          <a:p/>
+        </p:txBody>
       </p:sp>
       <p:sp>
         <p:nvSpPr>
@@ -33303,6 +34262,10 @@
           </a:solidFill>
           <a:ln/>
         </p:spPr>
+        <p:txBody>
+          <a:bodyPr/>
+          <a:p/>
+        </p:txBody>
       </p:sp>
       <p:sp>
         <p:nvSpPr>
@@ -33469,6 +34432,10 @@
           </a:solidFill>
           <a:ln/>
         </p:spPr>
+        <p:txBody>
+          <a:bodyPr/>
+          <a:p/>
+        </p:txBody>
       </p:sp>
       <p:sp>
         <p:nvSpPr>

--- a/Swim-Water-Safety_Years_9-10.pptx
+++ b/Swim-Water-Safety_Years_9-10.pptx
@@ -44,7 +44,6 @@
     <p:sldId id="292" r:id="rId38"/>
     <p:sldId id="293" r:id="rId39"/>
     <p:sldId id="294" r:id="rId40"/>
-    <p:sldId id="295" r:id="rId46"/>
   </p:sldIdLst>
   <p:notesMasterIdLst>
     <p:notesMasterId r:id="rId41"/>
@@ -4277,10 +4276,6 @@
           </a:solidFill>
           <a:ln/>
         </p:spPr>
-        <p:txBody>
-          <a:bodyPr/>
-          <a:p/>
-        </p:txBody>
       </p:sp>
       <p:sp>
         <p:nvSpPr>
@@ -4679,10 +4674,6 @@
           </a:solidFill>
           <a:ln/>
         </p:spPr>
-        <p:txBody>
-          <a:bodyPr/>
-          <a:p/>
-        </p:txBody>
       </p:sp>
       <p:sp>
         <p:nvSpPr>
@@ -5026,10 +5017,6 @@
           </a:solidFill>
           <a:ln/>
         </p:spPr>
-        <p:txBody>
-          <a:bodyPr/>
-          <a:p/>
-        </p:txBody>
       </p:sp>
       <p:sp>
         <p:nvSpPr>
@@ -5187,10 +5174,6 @@
             <a:prstDash val="solid"/>
           </a:ln>
         </p:spPr>
-        <p:txBody>
-          <a:bodyPr/>
-          <a:p/>
-        </p:txBody>
       </p:sp>
       <p:sp>
         <p:nvSpPr>
@@ -5256,10 +5239,6 @@
             <a:prstDash val="solid"/>
           </a:ln>
         </p:spPr>
-        <p:txBody>
-          <a:bodyPr/>
-          <a:p/>
-        </p:txBody>
       </p:sp>
       <p:sp>
         <p:nvSpPr>
@@ -5325,10 +5304,6 @@
             <a:prstDash val="solid"/>
           </a:ln>
         </p:spPr>
-        <p:txBody>
-          <a:bodyPr/>
-          <a:p/>
-        </p:txBody>
       </p:sp>
       <p:sp>
         <p:nvSpPr>
@@ -5507,10 +5482,6 @@
           </a:solidFill>
           <a:ln/>
         </p:spPr>
-        <p:txBody>
-          <a:bodyPr/>
-          <a:p/>
-        </p:txBody>
       </p:sp>
       <p:sp>
         <p:nvSpPr>
@@ -5657,10 +5628,6 @@
           </a:solidFill>
           <a:ln/>
         </p:spPr>
-        <p:txBody>
-          <a:bodyPr/>
-          <a:p/>
-        </p:txBody>
       </p:sp>
       <p:sp>
         <p:nvSpPr>
@@ -5841,10 +5808,6 @@
           </a:solidFill>
           <a:ln/>
         </p:spPr>
-        <p:txBody>
-          <a:bodyPr/>
-          <a:p/>
-        </p:txBody>
       </p:sp>
       <p:sp>
         <p:nvSpPr>
@@ -5991,10 +5954,6 @@
           </a:solidFill>
           <a:ln/>
         </p:spPr>
-        <p:txBody>
-          <a:bodyPr/>
-          <a:p/>
-        </p:txBody>
       </p:sp>
       <p:sp>
         <p:nvSpPr>
@@ -6141,10 +6100,6 @@
           </a:solidFill>
           <a:ln/>
         </p:spPr>
-        <p:txBody>
-          <a:bodyPr/>
-          <a:p/>
-        </p:txBody>
       </p:sp>
       <p:sp>
         <p:nvSpPr>
@@ -6405,10 +6360,6 @@
           </a:solidFill>
           <a:ln/>
         </p:spPr>
-        <p:txBody>
-          <a:bodyPr/>
-          <a:p/>
-        </p:txBody>
       </p:sp>
       <p:sp>
         <p:nvSpPr>
@@ -7259,10 +7210,6 @@
           </a:solidFill>
           <a:ln/>
         </p:spPr>
-        <p:txBody>
-          <a:bodyPr/>
-          <a:p/>
-        </p:txBody>
       </p:sp>
       <p:sp>
         <p:nvSpPr>
@@ -7643,10 +7590,6 @@
             <a:prstDash val="solid"/>
           </a:ln>
         </p:spPr>
-        <p:txBody>
-          <a:bodyPr/>
-          <a:p/>
-        </p:txBody>
       </p:sp>
       <p:sp>
         <p:nvSpPr>
@@ -7801,10 +7744,6 @@
             <a:prstDash val="solid"/>
           </a:ln>
         </p:spPr>
-        <p:txBody>
-          <a:bodyPr/>
-          <a:p/>
-        </p:txBody>
       </p:sp>
       <p:sp>
         <p:nvSpPr>
@@ -7954,10 +7893,6 @@
           </a:solidFill>
           <a:ln/>
         </p:spPr>
-        <p:txBody>
-          <a:bodyPr/>
-          <a:p/>
-        </p:txBody>
       </p:sp>
       <p:sp>
         <p:nvSpPr>
@@ -7978,10 +7913,6 @@
           </a:solidFill>
           <a:ln/>
         </p:spPr>
-        <p:txBody>
-          <a:bodyPr/>
-          <a:p/>
-        </p:txBody>
       </p:sp>
       <p:sp>
         <p:nvSpPr>
@@ -8002,10 +7933,6 @@
           </a:solidFill>
           <a:ln/>
         </p:spPr>
-        <p:txBody>
-          <a:bodyPr/>
-          <a:p/>
-        </p:txBody>
       </p:sp>
       <p:sp>
         <p:nvSpPr>
@@ -8026,10 +7953,6 @@
           </a:solidFill>
           <a:ln/>
         </p:spPr>
-        <p:txBody>
-          <a:bodyPr/>
-          <a:p/>
-        </p:txBody>
       </p:sp>
       <p:sp>
         <p:nvSpPr>
@@ -8050,10 +7973,6 @@
           </a:solidFill>
           <a:ln/>
         </p:spPr>
-        <p:txBody>
-          <a:bodyPr/>
-          <a:p/>
-        </p:txBody>
       </p:sp>
       <p:sp>
         <p:nvSpPr>
@@ -8220,10 +8139,6 @@
           </a:solidFill>
           <a:ln/>
         </p:spPr>
-        <p:txBody>
-          <a:bodyPr/>
-          <a:p/>
-        </p:txBody>
       </p:sp>
       <p:sp>
         <p:nvSpPr>
@@ -8244,10 +8159,6 @@
           </a:solidFill>
           <a:ln/>
         </p:spPr>
-        <p:txBody>
-          <a:bodyPr/>
-          <a:p/>
-        </p:txBody>
       </p:sp>
       <p:sp>
         <p:nvSpPr>
@@ -8268,10 +8179,6 @@
           </a:solidFill>
           <a:ln/>
         </p:spPr>
-        <p:txBody>
-          <a:bodyPr/>
-          <a:p/>
-        </p:txBody>
       </p:sp>
       <p:sp>
         <p:nvSpPr>
@@ -8292,10 +8199,6 @@
           </a:solidFill>
           <a:ln/>
         </p:spPr>
-        <p:txBody>
-          <a:bodyPr/>
-          <a:p/>
-        </p:txBody>
       </p:sp>
       <p:sp>
         <p:nvSpPr>
@@ -8316,10 +8219,6 @@
           </a:solidFill>
           <a:ln/>
         </p:spPr>
-        <p:txBody>
-          <a:bodyPr/>
-          <a:p/>
-        </p:txBody>
       </p:sp>
       <p:sp>
         <p:nvSpPr>
@@ -8668,10 +8567,6 @@
           </a:solidFill>
           <a:ln/>
         </p:spPr>
-        <p:txBody>
-          <a:bodyPr/>
-          <a:p/>
-        </p:txBody>
       </p:sp>
       <p:sp>
         <p:nvSpPr>
@@ -8979,10 +8874,6 @@
           </a:solidFill>
           <a:ln/>
         </p:spPr>
-        <p:txBody>
-          <a:bodyPr/>
-          <a:p/>
-        </p:txBody>
       </p:sp>
       <p:sp>
         <p:nvSpPr>
@@ -9140,10 +9031,6 @@
             <a:prstDash val="solid"/>
           </a:ln>
         </p:spPr>
-        <p:txBody>
-          <a:bodyPr/>
-          <a:p/>
-        </p:txBody>
       </p:sp>
       <p:sp>
         <p:nvSpPr>
@@ -9209,10 +9096,6 @@
             <a:prstDash val="solid"/>
           </a:ln>
         </p:spPr>
-        <p:txBody>
-          <a:bodyPr/>
-          <a:p/>
-        </p:txBody>
       </p:sp>
       <p:sp>
         <p:nvSpPr>
@@ -9278,10 +9161,6 @@
             <a:prstDash val="solid"/>
           </a:ln>
         </p:spPr>
-        <p:txBody>
-          <a:bodyPr/>
-          <a:p/>
-        </p:txBody>
       </p:sp>
       <p:sp>
         <p:nvSpPr>
@@ -9465,10 +9344,6 @@
             <a:prstDash val="solid"/>
           </a:ln>
         </p:spPr>
-        <p:txBody>
-          <a:bodyPr/>
-          <a:p/>
-        </p:txBody>
       </p:sp>
       <p:sp>
         <p:nvSpPr>
@@ -9530,10 +9405,6 @@
           </a:solidFill>
           <a:ln/>
         </p:spPr>
-        <p:txBody>
-          <a:bodyPr/>
-          <a:p/>
-        </p:txBody>
       </p:sp>
       <p:sp>
         <p:nvSpPr>
@@ -9661,7 +9532,7 @@
                 <a:ea typeface="Arial" pitchFamily="34" charset="-122"/>
                 <a:cs typeface="Arial" pitchFamily="34" charset="-120"/>
               </a:rPr>
-              <a:t>True — but incomplete. It can't explain why 37% of deaths since 2015–16 were people from multicultural backgrounds, or a 73% male skew.</a:t>
+              <a:t>True — but incomplete. It can't explain a 40% over-representation or an 80% male skew.</a:t>
             </a:r>
             <a:endParaRPr lang="en-US" sz="1950" dirty="0"/>
           </a:p>
@@ -9686,10 +9557,6 @@
           </a:solidFill>
           <a:ln/>
         </p:spPr>
-        <p:txBody>
-          <a:bodyPr/>
-          <a:p/>
-        </p:txBody>
       </p:sp>
       <p:sp>
         <p:nvSpPr>
@@ -9753,10 +9620,6 @@
           </a:solidFill>
           <a:ln/>
         </p:spPr>
-        <p:txBody>
-          <a:bodyPr/>
-          <a:p/>
-        </p:txBody>
       </p:sp>
       <p:sp>
         <p:nvSpPr>
@@ -10153,10 +10016,6 @@
             <a:prstDash val="solid"/>
           </a:ln>
         </p:spPr>
-        <p:txBody>
-          <a:bodyPr/>
-          <a:p/>
-        </p:txBody>
       </p:sp>
       <p:sp>
         <p:nvSpPr>
@@ -10267,10 +10126,6 @@
             <a:prstDash val="solid"/>
           </a:ln>
         </p:spPr>
-        <p:txBody>
-          <a:bodyPr/>
-          <a:p/>
-        </p:txBody>
       </p:sp>
       <p:sp>
         <p:nvSpPr>
@@ -10351,7 +10206,7 @@
                 <a:ea typeface="Arial" pitchFamily="34" charset="-122"/>
                 <a:cs typeface="Arial" pitchFamily="34" charset="-120"/>
               </a:rPr>
-              <a:t>Victorians from multicultural backgrounds may have had fewer opportunities to learn to swim — for reasons of cost, culture, or country-of-origin practice. The drowning data reflects that. LSV reports 58% of fishing-related drowning deaths since 2015–16 were people from multicultural backgrounds.</a:t>
+              <a:t>CALD Victorians may have had fewer opportunities to learn to swim — for reasons of cost, culture, or country-of-origin practice. The drowning data reflects that.</a:t>
             </a:r>
             <a:endParaRPr lang="en-US" sz="2025" dirty="0"/>
           </a:p>
@@ -10381,10 +10236,6 @@
             <a:prstDash val="solid"/>
           </a:ln>
         </p:spPr>
-        <p:txBody>
-          <a:bodyPr/>
-          <a:p/>
-        </p:txBody>
       </p:sp>
       <p:sp>
         <p:nvSpPr>
@@ -10495,10 +10346,6 @@
             <a:prstDash val="solid"/>
           </a:ln>
         </p:spPr>
-        <p:txBody>
-          <a:bodyPr/>
-          <a:p/>
-        </p:txBody>
       </p:sp>
       <p:sp>
         <p:nvSpPr>
@@ -10609,10 +10456,6 @@
             <a:prstDash val="solid"/>
           </a:ln>
         </p:spPr>
-        <p:txBody>
-          <a:bodyPr/>
-          <a:p/>
-        </p:txBody>
       </p:sp>
       <p:sp>
         <p:nvSpPr>
@@ -10723,10 +10566,6 @@
             <a:prstDash val="solid"/>
           </a:ln>
         </p:spPr>
-        <p:txBody>
-          <a:bodyPr/>
-          <a:p/>
-        </p:txBody>
       </p:sp>
       <p:sp>
         <p:nvSpPr>
@@ -11116,10 +10955,6 @@
           </a:solidFill>
           <a:ln/>
         </p:spPr>
-        <p:txBody>
-          <a:bodyPr/>
-          <a:p/>
-        </p:txBody>
       </p:sp>
       <p:sp>
         <p:nvSpPr>
@@ -11310,10 +11145,6 @@
           </a:solidFill>
           <a:ln/>
         </p:spPr>
-        <p:txBody>
-          <a:bodyPr/>
-          <a:p/>
-        </p:txBody>
       </p:sp>
       <p:sp>
         <p:nvSpPr>
@@ -11504,10 +11335,6 @@
           </a:solidFill>
           <a:ln/>
         </p:spPr>
-        <p:txBody>
-          <a:bodyPr/>
-          <a:p/>
-        </p:txBody>
       </p:sp>
       <p:sp>
         <p:nvSpPr>
@@ -11698,10 +11525,6 @@
           </a:solidFill>
           <a:ln/>
         </p:spPr>
-        <p:txBody>
-          <a:bodyPr/>
-          <a:p/>
-        </p:txBody>
       </p:sp>
       <p:sp>
         <p:nvSpPr>
@@ -11892,10 +11715,6 @@
           </a:solidFill>
           <a:ln/>
         </p:spPr>
-        <p:txBody>
-          <a:bodyPr/>
-          <a:p/>
-        </p:txBody>
       </p:sp>
       <p:sp>
         <p:nvSpPr>
@@ -12086,10 +11905,6 @@
           </a:solidFill>
           <a:ln/>
         </p:spPr>
-        <p:txBody>
-          <a:bodyPr/>
-          <a:p/>
-        </p:txBody>
       </p:sp>
       <p:sp>
         <p:nvSpPr>
@@ -12312,10 +12127,6 @@
           </a:solidFill>
           <a:ln/>
         </p:spPr>
-        <p:txBody>
-          <a:bodyPr/>
-          <a:p/>
-        </p:txBody>
       </p:sp>
       <p:sp>
         <p:nvSpPr>
@@ -12440,7 +12251,7 @@
                 <a:ea typeface="Arial" pitchFamily="34" charset="-122"/>
                 <a:cs typeface="Arial" pitchFamily="34" charset="-120"/>
               </a:rPr>
-              <a:t xml:space="preserve">37% of Victorian drowning deaths since 2015–16 were people from multicultural backgrounds. Standard curriculum alone is not closing this gap. In pairs · propose three specific actions — beyond the standard swim &amp; water safety lessons — that your school could realistically implement.</a:t>
+              <a:t xml:space="preserve">40% of 2023–24 deaths were CALD community members. Standard curriculum alone is not closing this gap. </a:t>
             </a:r>
             <a:pPr algn="l" indent="0" marL="0">
               <a:lnSpc>
@@ -12457,7 +12268,7 @@
                 <a:ea typeface="Arial" pitchFamily="34" charset="-122"/>
                 <a:cs typeface="Arial" pitchFamily="34" charset="-120"/>
               </a:rPr>
-              <a:t xml:space="preserve"/>
+              <a:t xml:space="preserve">In pairs · propose three specific actions </a:t>
             </a:r>
             <a:pPr algn="l" indent="0" marL="0">
               <a:lnSpc>
@@ -12474,7 +12285,7 @@
                 <a:ea typeface="Arial" pitchFamily="34" charset="-122"/>
                 <a:cs typeface="Arial" pitchFamily="34" charset="-120"/>
               </a:rPr>
-              <a:t/>
+              <a:t>— beyond the standard swim &amp; water safety lessons — that your school could realistically implement.</a:t>
             </a:r>
             <a:endParaRPr lang="en-US" sz="2250" dirty="0"/>
           </a:p>
@@ -12499,10 +12310,6 @@
           </a:solidFill>
           <a:ln/>
         </p:spPr>
-        <p:txBody>
-          <a:bodyPr/>
-          <a:p/>
-        </p:txBody>
       </p:sp>
       <p:sp>
         <p:nvSpPr>
@@ -12523,10 +12330,6 @@
           </a:solidFill>
           <a:ln/>
         </p:spPr>
-        <p:txBody>
-          <a:bodyPr/>
-          <a:p/>
-        </p:txBody>
       </p:sp>
       <p:sp>
         <p:nvSpPr>
@@ -12676,10 +12479,6 @@
           </a:solidFill>
           <a:ln/>
         </p:spPr>
-        <p:txBody>
-          <a:bodyPr/>
-          <a:p/>
-        </p:txBody>
       </p:sp>
       <p:sp>
         <p:nvSpPr>
@@ -12700,10 +12499,6 @@
           </a:solidFill>
           <a:ln/>
         </p:spPr>
-        <p:txBody>
-          <a:bodyPr/>
-          <a:p/>
-        </p:txBody>
       </p:sp>
       <p:sp>
         <p:nvSpPr>
@@ -12853,10 +12648,6 @@
           </a:solidFill>
           <a:ln/>
         </p:spPr>
-        <p:txBody>
-          <a:bodyPr/>
-          <a:p/>
-        </p:txBody>
       </p:sp>
       <p:sp>
         <p:nvSpPr>
@@ -12877,10 +12668,6 @@
           </a:solidFill>
           <a:ln/>
         </p:spPr>
-        <p:txBody>
-          <a:bodyPr/>
-          <a:p/>
-        </p:txBody>
       </p:sp>
       <p:sp>
         <p:nvSpPr>
@@ -13144,10 +12931,6 @@
           </a:solidFill>
           <a:ln/>
         </p:spPr>
-        <p:txBody>
-          <a:bodyPr/>
-          <a:p/>
-        </p:txBody>
       </p:sp>
       <p:sp>
         <p:nvSpPr>
@@ -13455,10 +13238,6 @@
           </a:solidFill>
           <a:ln/>
         </p:spPr>
-        <p:txBody>
-          <a:bodyPr/>
-          <a:p/>
-        </p:txBody>
       </p:sp>
       <p:sp>
         <p:nvSpPr>
@@ -13616,10 +13395,6 @@
             <a:prstDash val="solid"/>
           </a:ln>
         </p:spPr>
-        <p:txBody>
-          <a:bodyPr/>
-          <a:p/>
-        </p:txBody>
       </p:sp>
       <p:sp>
         <p:nvSpPr>
@@ -13685,10 +13460,6 @@
             <a:prstDash val="solid"/>
           </a:ln>
         </p:spPr>
-        <p:txBody>
-          <a:bodyPr/>
-          <a:p/>
-        </p:txBody>
       </p:sp>
       <p:sp>
         <p:nvSpPr>
@@ -13754,10 +13525,6 @@
             <a:prstDash val="solid"/>
           </a:ln>
         </p:spPr>
-        <p:txBody>
-          <a:bodyPr/>
-          <a:p/>
-        </p:txBody>
       </p:sp>
       <p:sp>
         <p:nvSpPr>
@@ -13851,10 +13618,6 @@
           </a:solidFill>
           <a:ln/>
         </p:spPr>
-        <p:txBody>
-          <a:bodyPr/>
-          <a:p/>
-        </p:txBody>
       </p:sp>
       <p:sp>
         <p:nvSpPr>
@@ -14359,10 +14122,6 @@
             <a:prstDash val="solid"/>
           </a:ln>
         </p:spPr>
-        <p:txBody>
-          <a:bodyPr/>
-          <a:p/>
-        </p:txBody>
       </p:sp>
       <p:sp>
         <p:nvSpPr>
@@ -14514,10 +14273,6 @@
             <a:prstDash val="solid"/>
           </a:ln>
         </p:spPr>
-        <p:txBody>
-          <a:bodyPr/>
-          <a:p/>
-        </p:txBody>
       </p:sp>
       <p:sp>
         <p:nvSpPr>
@@ -14639,7 +14394,7 @@
                 <a:ea typeface="Arial" pitchFamily="34" charset="-122"/>
                 <a:cs typeface="Arial" pitchFamily="34" charset="-120"/>
               </a:rPr>
-              <a:t>Zero of the 52 deaths in 2024–25 were in public swimming pools — but 25% were in home environments. Supervision works where it exists.</a:t>
+              <a:t>All 54 Victorian 2023–24 drowning deaths were at unpatrolled locations. Where patrols are, deaths aren't.</a:t>
             </a:r>
             <a:endParaRPr lang="en-US" sz="1950" dirty="0"/>
           </a:p>
@@ -14669,10 +14424,6 @@
             <a:prstDash val="solid"/>
           </a:ln>
         </p:spPr>
-        <p:txBody>
-          <a:bodyPr/>
-          <a:p/>
-        </p:txBody>
       </p:sp>
       <p:sp>
         <p:nvSpPr>
@@ -14858,10 +14609,6 @@
             <a:prstDash val="solid"/>
           </a:ln>
         </p:spPr>
-        <p:txBody>
-          <a:bodyPr/>
-          <a:p/>
-        </p:txBody>
       </p:sp>
       <p:sp>
         <p:nvSpPr>
@@ -15013,10 +14760,6 @@
             <a:prstDash val="solid"/>
           </a:ln>
         </p:spPr>
-        <p:txBody>
-          <a:bodyPr/>
-          <a:p/>
-        </p:txBody>
       </p:sp>
       <p:sp>
         <p:nvSpPr>
@@ -15168,10 +14911,6 @@
             <a:prstDash val="solid"/>
           </a:ln>
         </p:spPr>
-        <p:txBody>
-          <a:bodyPr/>
-          <a:p/>
-        </p:txBody>
       </p:sp>
       <p:sp>
         <p:nvSpPr>
@@ -15517,10 +15256,6 @@
           </a:solidFill>
           <a:ln/>
         </p:spPr>
-        <p:txBody>
-          <a:bodyPr/>
-          <a:p/>
-        </p:txBody>
       </p:sp>
       <p:sp>
         <p:nvSpPr>
@@ -15585,10 +15320,6 @@
           </a:solidFill>
           <a:ln/>
         </p:spPr>
-        <p:txBody>
-          <a:bodyPr/>
-          <a:p/>
-        </p:txBody>
       </p:sp>
       <p:sp>
         <p:nvSpPr>
@@ -15653,10 +15384,6 @@
           </a:solidFill>
           <a:ln/>
         </p:spPr>
-        <p:txBody>
-          <a:bodyPr/>
-          <a:p/>
-        </p:txBody>
       </p:sp>
       <p:sp>
         <p:nvSpPr>
@@ -15721,10 +15448,6 @@
           </a:solidFill>
           <a:ln/>
         </p:spPr>
-        <p:txBody>
-          <a:bodyPr/>
-          <a:p/>
-        </p:txBody>
       </p:sp>
       <p:sp>
         <p:nvSpPr>
@@ -15789,10 +15512,6 @@
           </a:solidFill>
           <a:ln/>
         </p:spPr>
-        <p:txBody>
-          <a:bodyPr/>
-          <a:p/>
-        </p:txBody>
       </p:sp>
       <p:sp>
         <p:nvSpPr>
@@ -15857,10 +15576,6 @@
           </a:solidFill>
           <a:ln/>
         </p:spPr>
-        <p:txBody>
-          <a:bodyPr/>
-          <a:p/>
-        </p:txBody>
       </p:sp>
       <p:sp>
         <p:nvSpPr>
@@ -15925,10 +15640,6 @@
           </a:solidFill>
           <a:ln/>
         </p:spPr>
-        <p:txBody>
-          <a:bodyPr/>
-          <a:p/>
-        </p:txBody>
       </p:sp>
       <p:sp>
         <p:nvSpPr>
@@ -15993,10 +15704,6 @@
           </a:solidFill>
           <a:ln/>
         </p:spPr>
-        <p:txBody>
-          <a:bodyPr/>
-          <a:p/>
-        </p:txBody>
       </p:sp>
       <p:sp>
         <p:nvSpPr>
@@ -16061,10 +15768,6 @@
           </a:solidFill>
           <a:ln/>
         </p:spPr>
-        <p:txBody>
-          <a:bodyPr/>
-          <a:p/>
-        </p:txBody>
       </p:sp>
       <p:sp>
         <p:nvSpPr>
@@ -16129,10 +15832,6 @@
           </a:solidFill>
           <a:ln/>
         </p:spPr>
-        <p:txBody>
-          <a:bodyPr/>
-          <a:p/>
-        </p:txBody>
       </p:sp>
       <p:sp>
         <p:nvSpPr>
@@ -16197,10 +15896,6 @@
           </a:solidFill>
           <a:ln/>
         </p:spPr>
-        <p:txBody>
-          <a:bodyPr/>
-          <a:p/>
-        </p:txBody>
       </p:sp>
       <p:sp>
         <p:nvSpPr>
@@ -16265,10 +15960,6 @@
           </a:solidFill>
           <a:ln/>
         </p:spPr>
-        <p:txBody>
-          <a:bodyPr/>
-          <a:p/>
-        </p:txBody>
       </p:sp>
       <p:sp>
         <p:nvSpPr>
@@ -16333,10 +16024,6 @@
           </a:solidFill>
           <a:ln/>
         </p:spPr>
-        <p:txBody>
-          <a:bodyPr/>
-          <a:p/>
-        </p:txBody>
       </p:sp>
       <p:sp>
         <p:nvSpPr>
@@ -16401,10 +16088,6 @@
           </a:solidFill>
           <a:ln/>
         </p:spPr>
-        <p:txBody>
-          <a:bodyPr/>
-          <a:p/>
-        </p:txBody>
       </p:sp>
       <p:sp>
         <p:nvSpPr>
@@ -16469,10 +16152,6 @@
           </a:solidFill>
           <a:ln/>
         </p:spPr>
-        <p:txBody>
-          <a:bodyPr/>
-          <a:p/>
-        </p:txBody>
       </p:sp>
       <p:sp>
         <p:nvSpPr>
@@ -16537,10 +16216,6 @@
           </a:solidFill>
           <a:ln/>
         </p:spPr>
-        <p:txBody>
-          <a:bodyPr/>
-          <a:p/>
-        </p:txBody>
       </p:sp>
       <p:sp>
         <p:nvSpPr>
@@ -16605,10 +16280,6 @@
           </a:solidFill>
           <a:ln/>
         </p:spPr>
-        <p:txBody>
-          <a:bodyPr/>
-          <a:p/>
-        </p:txBody>
       </p:sp>
       <p:sp>
         <p:nvSpPr>
@@ -16673,10 +16344,6 @@
           </a:solidFill>
           <a:ln/>
         </p:spPr>
-        <p:txBody>
-          <a:bodyPr/>
-          <a:p/>
-        </p:txBody>
       </p:sp>
       <p:sp>
         <p:nvSpPr>
@@ -16741,10 +16408,6 @@
           </a:solidFill>
           <a:ln/>
         </p:spPr>
-        <p:txBody>
-          <a:bodyPr/>
-          <a:p/>
-        </p:txBody>
       </p:sp>
       <p:sp>
         <p:nvSpPr>
@@ -16809,10 +16472,6 @@
           </a:solidFill>
           <a:ln/>
         </p:spPr>
-        <p:txBody>
-          <a:bodyPr/>
-          <a:p/>
-        </p:txBody>
       </p:sp>
       <p:sp>
         <p:nvSpPr>
@@ -16877,10 +16536,6 @@
           </a:solidFill>
           <a:ln/>
         </p:spPr>
-        <p:txBody>
-          <a:bodyPr/>
-          <a:p/>
-        </p:txBody>
       </p:sp>
       <p:sp>
         <p:nvSpPr>
@@ -16945,10 +16600,6 @@
           </a:solidFill>
           <a:ln/>
         </p:spPr>
-        <p:txBody>
-          <a:bodyPr/>
-          <a:p/>
-        </p:txBody>
       </p:sp>
       <p:sp>
         <p:nvSpPr>
@@ -17013,10 +16664,6 @@
           </a:solidFill>
           <a:ln/>
         </p:spPr>
-        <p:txBody>
-          <a:bodyPr/>
-          <a:p/>
-        </p:txBody>
       </p:sp>
       <p:sp>
         <p:nvSpPr>
@@ -17056,7 +16703,7 @@
                 <a:ea typeface="Arial" pitchFamily="34" charset="-122"/>
                 <a:cs typeface="Arial" pitchFamily="34" charset="-120"/>
               </a:rPr>
-              <a:t>The over-represented group</a:t>
+              <a:t>The 40%-over-represented group</a:t>
             </a:r>
             <a:endParaRPr lang="en-US" sz="1800" dirty="0"/>
           </a:p>
@@ -17081,10 +16728,6 @@
           </a:solidFill>
           <a:ln/>
         </p:spPr>
-        <p:txBody>
-          <a:bodyPr/>
-          <a:p/>
-        </p:txBody>
       </p:sp>
       <p:sp>
         <p:nvSpPr>
@@ -17149,10 +16792,6 @@
           </a:solidFill>
           <a:ln/>
         </p:spPr>
-        <p:txBody>
-          <a:bodyPr/>
-          <a:p/>
-        </p:txBody>
       </p:sp>
       <p:sp>
         <p:nvSpPr>
@@ -17173,10 +16812,6 @@
           </a:solidFill>
           <a:ln/>
         </p:spPr>
-        <p:txBody>
-          <a:bodyPr/>
-          <a:p/>
-        </p:txBody>
       </p:sp>
       <p:sp>
         <p:nvSpPr>
@@ -17477,10 +17112,6 @@
           </a:solidFill>
           <a:ln/>
         </p:spPr>
-        <p:txBody>
-          <a:bodyPr/>
-          <a:p/>
-        </p:txBody>
       </p:sp>
       <p:sp>
         <p:nvSpPr>
@@ -17501,10 +17132,6 @@
           </a:solidFill>
           <a:ln/>
         </p:spPr>
-        <p:txBody>
-          <a:bodyPr/>
-          <a:p/>
-        </p:txBody>
       </p:sp>
       <p:sp>
         <p:nvSpPr>
@@ -17695,10 +17322,6 @@
           </a:solidFill>
           <a:ln/>
         </p:spPr>
-        <p:txBody>
-          <a:bodyPr/>
-          <a:p/>
-        </p:txBody>
       </p:sp>
       <p:sp>
         <p:nvSpPr>
@@ -17719,10 +17342,6 @@
           </a:solidFill>
           <a:ln/>
         </p:spPr>
-        <p:txBody>
-          <a:bodyPr/>
-          <a:p/>
-        </p:txBody>
       </p:sp>
       <p:sp>
         <p:nvSpPr>
@@ -17913,10 +17532,6 @@
           </a:solidFill>
           <a:ln/>
         </p:spPr>
-        <p:txBody>
-          <a:bodyPr/>
-          <a:p/>
-        </p:txBody>
       </p:sp>
       <p:sp>
         <p:nvSpPr>
@@ -17937,10 +17552,6 @@
           </a:solidFill>
           <a:ln/>
         </p:spPr>
-        <p:txBody>
-          <a:bodyPr/>
-          <a:p/>
-        </p:txBody>
       </p:sp>
       <p:sp>
         <p:nvSpPr>
@@ -18131,10 +17742,6 @@
           </a:solidFill>
           <a:ln/>
         </p:spPr>
-        <p:txBody>
-          <a:bodyPr/>
-          <a:p/>
-        </p:txBody>
       </p:sp>
       <p:sp>
         <p:nvSpPr>
@@ -18155,10 +17762,6 @@
           </a:solidFill>
           <a:ln/>
         </p:spPr>
-        <p:txBody>
-          <a:bodyPr/>
-          <a:p/>
-        </p:txBody>
       </p:sp>
       <p:sp>
         <p:nvSpPr>
@@ -18394,10 +17997,6 @@
           </a:solidFill>
           <a:ln/>
         </p:spPr>
-        <p:txBody>
-          <a:bodyPr/>
-          <a:p/>
-        </p:txBody>
       </p:sp>
       <p:sp>
         <p:nvSpPr>
@@ -18705,10 +18304,6 @@
           </a:solidFill>
           <a:ln/>
         </p:spPr>
-        <p:txBody>
-          <a:bodyPr/>
-          <a:p/>
-        </p:txBody>
       </p:sp>
       <p:sp>
         <p:nvSpPr>
@@ -18866,10 +18461,6 @@
             <a:prstDash val="solid"/>
           </a:ln>
         </p:spPr>
-        <p:txBody>
-          <a:bodyPr/>
-          <a:p/>
-        </p:txBody>
       </p:sp>
       <p:sp>
         <p:nvSpPr>
@@ -18935,10 +18526,6 @@
             <a:prstDash val="solid"/>
           </a:ln>
         </p:spPr>
-        <p:txBody>
-          <a:bodyPr/>
-          <a:p/>
-        </p:txBody>
       </p:sp>
       <p:sp>
         <p:nvSpPr>
@@ -19004,10 +18591,6 @@
             <a:prstDash val="solid"/>
           </a:ln>
         </p:spPr>
-        <p:txBody>
-          <a:bodyPr/>
-          <a:p/>
-        </p:txBody>
       </p:sp>
       <p:sp>
         <p:nvSpPr>
@@ -19073,10 +18656,6 @@
             <a:prstDash val="solid"/>
           </a:ln>
         </p:spPr>
-        <p:txBody>
-          <a:bodyPr/>
-          <a:p/>
-        </p:txBody>
       </p:sp>
       <p:sp>
         <p:nvSpPr>
@@ -19296,10 +18875,6 @@
           </a:solidFill>
           <a:ln/>
         </p:spPr>
-        <p:txBody>
-          <a:bodyPr/>
-          <a:p/>
-        </p:txBody>
       </p:sp>
       <p:sp>
         <p:nvSpPr>
@@ -19466,10 +19041,6 @@
           </a:solidFill>
           <a:ln/>
         </p:spPr>
-        <p:txBody>
-          <a:bodyPr/>
-          <a:p/>
-        </p:txBody>
       </p:sp>
       <p:sp>
         <p:nvSpPr>
@@ -19636,10 +19207,6 @@
           </a:solidFill>
           <a:ln/>
         </p:spPr>
-        <p:txBody>
-          <a:bodyPr/>
-          <a:p/>
-        </p:txBody>
       </p:sp>
       <p:sp>
         <p:nvSpPr>
@@ -19823,10 +19390,6 @@
           </a:solidFill>
           <a:ln/>
         </p:spPr>
-        <p:txBody>
-          <a:bodyPr/>
-          <a:p/>
-        </p:txBody>
       </p:sp>
       <p:sp>
         <p:nvSpPr>
@@ -20044,10 +19607,6 @@
           </a:solidFill>
           <a:ln/>
         </p:spPr>
-        <p:txBody>
-          <a:bodyPr/>
-          <a:p/>
-        </p:txBody>
       </p:sp>
       <p:sp>
         <p:nvSpPr>
@@ -20214,10 +19773,6 @@
           </a:solidFill>
           <a:ln/>
         </p:spPr>
-        <p:txBody>
-          <a:bodyPr/>
-          <a:p/>
-        </p:txBody>
       </p:sp>
       <p:sp>
         <p:nvSpPr>
@@ -20583,10 +20138,6 @@
           </a:solidFill>
           <a:ln/>
         </p:spPr>
-        <p:txBody>
-          <a:bodyPr/>
-          <a:p/>
-        </p:txBody>
       </p:sp>
       <p:sp>
         <p:nvSpPr>
@@ -20792,10 +20343,6 @@
           </a:solidFill>
           <a:ln/>
         </p:spPr>
-        <p:txBody>
-          <a:bodyPr/>
-          <a:p/>
-        </p:txBody>
       </p:sp>
       <p:sp>
         <p:nvSpPr>
@@ -21325,10 +20872,6 @@
           </a:solidFill>
           <a:ln/>
         </p:spPr>
-        <p:txBody>
-          <a:bodyPr/>
-          <a:p/>
-        </p:txBody>
       </p:sp>
       <p:sp>
         <p:nvSpPr>
@@ -21434,10 +20977,6 @@
           </a:solidFill>
           <a:ln/>
         </p:spPr>
-        <p:txBody>
-          <a:bodyPr/>
-          <a:p/>
-        </p:txBody>
       </p:sp>
       <p:sp>
         <p:nvSpPr>
@@ -21458,10 +20997,6 @@
           </a:solidFill>
           <a:ln/>
         </p:spPr>
-        <p:txBody>
-          <a:bodyPr/>
-          <a:p/>
-        </p:txBody>
       </p:sp>
       <p:sp>
         <p:nvSpPr>
@@ -21686,10 +21221,6 @@
           </a:solidFill>
           <a:ln/>
         </p:spPr>
-        <p:txBody>
-          <a:bodyPr/>
-          <a:p/>
-        </p:txBody>
       </p:sp>
       <p:sp>
         <p:nvSpPr>
@@ -21710,10 +21241,6 @@
           </a:solidFill>
           <a:ln/>
         </p:spPr>
-        <p:txBody>
-          <a:bodyPr/>
-          <a:p/>
-        </p:txBody>
       </p:sp>
       <p:sp>
         <p:nvSpPr>
@@ -21921,10 +21448,6 @@
           </a:solidFill>
           <a:ln/>
         </p:spPr>
-        <p:txBody>
-          <a:bodyPr/>
-          <a:p/>
-        </p:txBody>
       </p:sp>
       <p:sp>
         <p:nvSpPr>
@@ -21945,10 +21468,6 @@
           </a:solidFill>
           <a:ln/>
         </p:spPr>
-        <p:txBody>
-          <a:bodyPr/>
-          <a:p/>
-        </p:txBody>
       </p:sp>
       <p:sp>
         <p:nvSpPr>
@@ -22173,10 +21692,6 @@
           </a:solidFill>
           <a:ln/>
         </p:spPr>
-        <p:txBody>
-          <a:bodyPr/>
-          <a:p/>
-        </p:txBody>
       </p:sp>
       <p:sp>
         <p:nvSpPr>
@@ -22479,10 +21994,6 @@
           </a:solidFill>
           <a:ln/>
         </p:spPr>
-        <p:txBody>
-          <a:bodyPr/>
-          <a:p/>
-        </p:txBody>
       </p:sp>
       <p:sp>
         <p:nvSpPr>
@@ -22632,10 +22143,6 @@
           </a:solidFill>
           <a:ln/>
         </p:spPr>
-        <p:txBody>
-          <a:bodyPr/>
-          <a:p/>
-        </p:txBody>
       </p:sp>
       <p:sp>
         <p:nvSpPr>
@@ -22785,10 +22292,6 @@
           </a:solidFill>
           <a:ln/>
         </p:spPr>
-        <p:txBody>
-          <a:bodyPr/>
-          <a:p/>
-        </p:txBody>
       </p:sp>
       <p:sp>
         <p:nvSpPr>
@@ -22938,10 +22441,6 @@
           </a:solidFill>
           <a:ln/>
         </p:spPr>
-        <p:txBody>
-          <a:bodyPr/>
-          <a:p/>
-        </p:txBody>
       </p:sp>
       <p:sp>
         <p:nvSpPr>
@@ -23091,10 +22590,6 @@
           </a:solidFill>
           <a:ln/>
         </p:spPr>
-        <p:txBody>
-          <a:bodyPr/>
-          <a:p/>
-        </p:txBody>
       </p:sp>
       <p:sp>
         <p:nvSpPr>
@@ -23443,10 +22938,6 @@
           </a:solidFill>
           <a:ln/>
         </p:spPr>
-        <p:txBody>
-          <a:bodyPr/>
-          <a:p/>
-        </p:txBody>
       </p:sp>
       <p:sp>
         <p:nvSpPr>
@@ -23467,10 +22958,6 @@
           </a:solidFill>
           <a:ln/>
         </p:spPr>
-        <p:txBody>
-          <a:bodyPr/>
-          <a:p/>
-        </p:txBody>
       </p:sp>
       <p:sp>
         <p:nvSpPr>
@@ -23637,10 +23124,6 @@
           </a:solidFill>
           <a:ln/>
         </p:spPr>
-        <p:txBody>
-          <a:bodyPr/>
-          <a:p/>
-        </p:txBody>
       </p:sp>
       <p:sp>
         <p:nvSpPr>
@@ -23661,10 +23144,6 @@
           </a:solidFill>
           <a:ln/>
         </p:spPr>
-        <p:txBody>
-          <a:bodyPr/>
-          <a:p/>
-        </p:txBody>
       </p:sp>
       <p:sp>
         <p:nvSpPr>
@@ -23831,10 +23310,6 @@
           </a:solidFill>
           <a:ln/>
         </p:spPr>
-        <p:txBody>
-          <a:bodyPr/>
-          <a:p/>
-        </p:txBody>
       </p:sp>
       <p:sp>
         <p:nvSpPr>
@@ -23855,10 +23330,6 @@
           </a:solidFill>
           <a:ln/>
         </p:spPr>
-        <p:txBody>
-          <a:bodyPr/>
-          <a:p/>
-        </p:txBody>
       </p:sp>
       <p:sp>
         <p:nvSpPr>
@@ -24025,10 +23496,6 @@
           </a:solidFill>
           <a:ln/>
         </p:spPr>
-        <p:txBody>
-          <a:bodyPr/>
-          <a:p/>
-        </p:txBody>
       </p:sp>
       <p:sp>
         <p:nvSpPr>
@@ -24049,10 +23516,6 @@
           </a:solidFill>
           <a:ln/>
         </p:spPr>
-        <p:txBody>
-          <a:bodyPr/>
-          <a:p/>
-        </p:txBody>
       </p:sp>
       <p:sp>
         <p:nvSpPr>
@@ -24219,10 +23682,6 @@
           </a:solidFill>
           <a:ln/>
         </p:spPr>
-        <p:txBody>
-          <a:bodyPr/>
-          <a:p/>
-        </p:txBody>
       </p:sp>
       <p:sp>
         <p:nvSpPr>
@@ -24243,10 +23702,6 @@
           </a:solidFill>
           <a:ln/>
         </p:spPr>
-        <p:txBody>
-          <a:bodyPr/>
-          <a:p/>
-        </p:txBody>
       </p:sp>
       <p:sp>
         <p:nvSpPr>
@@ -24413,10 +23868,6 @@
           </a:solidFill>
           <a:ln/>
         </p:spPr>
-        <p:txBody>
-          <a:bodyPr/>
-          <a:p/>
-        </p:txBody>
       </p:sp>
       <p:sp>
         <p:nvSpPr>
@@ -24437,10 +23888,6 @@
           </a:solidFill>
           <a:ln/>
         </p:spPr>
-        <p:txBody>
-          <a:bodyPr/>
-          <a:p/>
-        </p:txBody>
       </p:sp>
       <p:sp>
         <p:nvSpPr>
@@ -24721,10 +24168,6 @@
           </a:solidFill>
           <a:ln/>
         </p:spPr>
-        <p:txBody>
-          <a:bodyPr/>
-          <a:p/>
-        </p:txBody>
       </p:sp>
       <p:sp>
         <p:nvSpPr>
@@ -25030,10 +24473,6 @@
           </a:solidFill>
           <a:ln/>
         </p:spPr>
-        <p:txBody>
-          <a:bodyPr/>
-          <a:p/>
-        </p:txBody>
       </p:sp>
       <p:sp>
         <p:nvSpPr>
@@ -25375,10 +24814,6 @@
           </a:solidFill>
           <a:ln/>
         </p:spPr>
-        <p:txBody>
-          <a:bodyPr/>
-          <a:p/>
-        </p:txBody>
       </p:sp>
       <p:sp>
         <p:nvSpPr>
@@ -25536,10 +24971,6 @@
             <a:prstDash val="solid"/>
           </a:ln>
         </p:spPr>
-        <p:txBody>
-          <a:bodyPr/>
-          <a:p/>
-        </p:txBody>
       </p:sp>
       <p:sp>
         <p:nvSpPr>
@@ -25605,10 +25036,6 @@
             <a:prstDash val="solid"/>
           </a:ln>
         </p:spPr>
-        <p:txBody>
-          <a:bodyPr/>
-          <a:p/>
-        </p:txBody>
       </p:sp>
       <p:sp>
         <p:nvSpPr>
@@ -25674,10 +25101,6 @@
             <a:prstDash val="solid"/>
           </a:ln>
         </p:spPr>
-        <p:txBody>
-          <a:bodyPr/>
-          <a:p/>
-        </p:txBody>
       </p:sp>
       <p:sp>
         <p:nvSpPr>
@@ -25856,10 +25279,6 @@
           </a:solidFill>
           <a:ln/>
         </p:spPr>
-        <p:txBody>
-          <a:bodyPr/>
-          <a:p/>
-        </p:txBody>
       </p:sp>
       <p:sp>
         <p:nvSpPr>
@@ -25880,10 +25299,6 @@
           </a:solidFill>
           <a:ln/>
         </p:spPr>
-        <p:txBody>
-          <a:bodyPr/>
-          <a:p/>
-        </p:txBody>
       </p:sp>
       <p:sp>
         <p:nvSpPr>
@@ -26033,10 +25448,6 @@
           </a:solidFill>
           <a:ln/>
         </p:spPr>
-        <p:txBody>
-          <a:bodyPr/>
-          <a:p/>
-        </p:txBody>
       </p:sp>
       <p:sp>
         <p:nvSpPr>
@@ -26098,10 +25509,6 @@
           </a:solidFill>
           <a:ln/>
         </p:spPr>
-        <p:txBody>
-          <a:bodyPr/>
-          <a:p/>
-        </p:txBody>
       </p:sp>
       <p:sp>
         <p:nvSpPr>
@@ -26122,10 +25529,6 @@
           </a:solidFill>
           <a:ln/>
         </p:spPr>
-        <p:txBody>
-          <a:bodyPr/>
-          <a:p/>
-        </p:txBody>
       </p:sp>
       <p:sp>
         <p:nvSpPr>
@@ -26275,10 +25678,6 @@
           </a:solidFill>
           <a:ln/>
         </p:spPr>
-        <p:txBody>
-          <a:bodyPr/>
-          <a:p/>
-        </p:txBody>
       </p:sp>
       <p:sp>
         <p:nvSpPr>
@@ -26340,10 +25739,6 @@
           </a:solidFill>
           <a:ln/>
         </p:spPr>
-        <p:txBody>
-          <a:bodyPr/>
-          <a:p/>
-        </p:txBody>
       </p:sp>
       <p:sp>
         <p:nvSpPr>
@@ -26364,10 +25759,6 @@
           </a:solidFill>
           <a:ln/>
         </p:spPr>
-        <p:txBody>
-          <a:bodyPr/>
-          <a:p/>
-        </p:txBody>
       </p:sp>
       <p:sp>
         <p:nvSpPr>
@@ -26521,10 +25912,6 @@
           </a:solidFill>
           <a:ln/>
         </p:spPr>
-        <p:txBody>
-          <a:bodyPr/>
-          <a:p/>
-        </p:txBody>
       </p:sp>
       <p:sp>
         <p:nvSpPr>
@@ -26588,10 +25975,6 @@
           </a:solidFill>
           <a:ln/>
         </p:spPr>
-        <p:txBody>
-          <a:bodyPr/>
-          <a:p/>
-        </p:txBody>
       </p:sp>
       <p:sp>
         <p:nvSpPr>
@@ -26612,10 +25995,6 @@
           </a:solidFill>
           <a:ln/>
         </p:spPr>
-        <p:txBody>
-          <a:bodyPr/>
-          <a:p/>
-        </p:txBody>
       </p:sp>
       <p:sp>
         <p:nvSpPr>
@@ -26899,10 +26278,6 @@
           </a:solidFill>
           <a:ln/>
         </p:spPr>
-        <p:txBody>
-          <a:bodyPr/>
-          <a:p/>
-        </p:txBody>
       </p:sp>
       <p:sp>
         <p:nvSpPr>
@@ -27052,10 +26427,6 @@
           </a:solidFill>
           <a:ln/>
         </p:spPr>
-        <p:txBody>
-          <a:bodyPr/>
-          <a:p/>
-        </p:txBody>
       </p:sp>
       <p:sp>
         <p:nvSpPr>
@@ -27205,10 +26576,6 @@
           </a:solidFill>
           <a:ln/>
         </p:spPr>
-        <p:txBody>
-          <a:bodyPr/>
-          <a:p/>
-        </p:txBody>
       </p:sp>
       <p:sp>
         <p:nvSpPr>
@@ -27358,10 +26725,6 @@
           </a:solidFill>
           <a:ln/>
         </p:spPr>
-        <p:txBody>
-          <a:bodyPr/>
-          <a:p/>
-        </p:txBody>
       </p:sp>
       <p:sp>
         <p:nvSpPr>
@@ -27511,10 +26874,6 @@
           </a:solidFill>
           <a:ln/>
         </p:spPr>
-        <p:txBody>
-          <a:bodyPr/>
-          <a:p/>
-        </p:txBody>
       </p:sp>
       <p:sp>
         <p:nvSpPr>
@@ -27664,10 +27023,6 @@
           </a:solidFill>
           <a:ln/>
         </p:spPr>
-        <p:txBody>
-          <a:bodyPr/>
-          <a:p/>
-        </p:txBody>
       </p:sp>
       <p:sp>
         <p:nvSpPr>
@@ -29005,10 +28360,6 @@
           </a:solidFill>
           <a:ln/>
         </p:spPr>
-        <p:txBody>
-          <a:bodyPr/>
-          <a:p/>
-        </p:txBody>
       </p:sp>
       <p:sp>
         <p:nvSpPr>
@@ -29137,7 +28488,7 @@
                 <a:ea typeface="Arial" pitchFamily="34" charset="-122"/>
                 <a:cs typeface="Arial" pitchFamily="34" charset="-120"/>
               </a:rPr>
-              <a:t>52 Victorian deaths · 2024–25</a:t>
+              <a:t>54 Victorian deaths · 2023–24</a:t>
             </a:r>
             <a:endParaRPr lang="en-US" sz="1800" dirty="0"/>
           </a:p>
@@ -29161,7 +28512,7 @@
                 <a:ea typeface="Arial" pitchFamily="34" charset="-122"/>
                 <a:cs typeface="Arial" pitchFamily="34" charset="-120"/>
               </a:rPr>
-              <a:t>Non-fatals 37% above 10-yr avg</a:t>
+              <a:t>Non-fatals 60% above 10-yr avg</a:t>
             </a:r>
             <a:endParaRPr lang="en-US" sz="1800" dirty="0"/>
           </a:p>
@@ -29185,7 +28536,7 @@
                 <a:ea typeface="Arial" pitchFamily="34" charset="-122"/>
                 <a:cs typeface="Arial" pitchFamily="34" charset="-120"/>
               </a:rPr>
-              <a:t>37% multicultural over-representation</a:t>
+              <a:t>~40% CALD over-representation</a:t>
             </a:r>
             <a:endParaRPr lang="en-US" sz="1800" dirty="0"/>
           </a:p>
@@ -29234,10 +28585,6 @@
           </a:solidFill>
           <a:ln/>
         </p:spPr>
-        <p:txBody>
-          <a:bodyPr/>
-          <a:p/>
-        </p:txBody>
       </p:sp>
       <p:sp>
         <p:nvSpPr>
@@ -29463,10 +28810,6 @@
           </a:solidFill>
           <a:ln/>
         </p:spPr>
-        <p:txBody>
-          <a:bodyPr/>
-          <a:p/>
-        </p:txBody>
       </p:sp>
       <p:sp>
         <p:nvSpPr>
@@ -29795,10 +29138,6 @@
           </a:solidFill>
           <a:ln/>
         </p:spPr>
-        <p:txBody>
-          <a:bodyPr/>
-          <a:p/>
-        </p:txBody>
       </p:sp>
       <p:sp>
         <p:nvSpPr>
@@ -30024,10 +29363,6 @@
           </a:solidFill>
           <a:ln/>
         </p:spPr>
-        <p:txBody>
-          <a:bodyPr/>
-          <a:p/>
-        </p:txBody>
       </p:sp>
       <p:sp>
         <p:nvSpPr>
@@ -30253,10 +29588,6 @@
           </a:solidFill>
           <a:ln/>
         </p:spPr>
-        <p:txBody>
-          <a:bodyPr/>
-          <a:p/>
-        </p:txBody>
       </p:sp>
       <p:sp>
         <p:nvSpPr>
@@ -30596,10 +29927,6 @@
           </a:solidFill>
           <a:ln/>
         </p:spPr>
-        <p:txBody>
-          <a:bodyPr/>
-          <a:p/>
-        </p:txBody>
       </p:sp>
       <p:sp>
         <p:nvSpPr>
@@ -30757,10 +30084,6 @@
             <a:prstDash val="solid"/>
           </a:ln>
         </p:spPr>
-        <p:txBody>
-          <a:bodyPr/>
-          <a:p/>
-        </p:txBody>
       </p:sp>
       <p:sp>
         <p:nvSpPr>
@@ -30826,10 +30149,6 @@
             <a:prstDash val="solid"/>
           </a:ln>
         </p:spPr>
-        <p:txBody>
-          <a:bodyPr/>
-          <a:p/>
-        </p:txBody>
       </p:sp>
       <p:sp>
         <p:nvSpPr>
@@ -30895,10 +30214,6 @@
             <a:prstDash val="solid"/>
           </a:ln>
         </p:spPr>
-        <p:txBody>
-          <a:bodyPr/>
-          <a:p/>
-        </p:txBody>
       </p:sp>
       <p:sp>
         <p:nvSpPr>
@@ -30938,212 +30253,6 @@
               <a:t>CLASSROOM · INDIVIDUAL + PAIRS</a:t>
             </a:r>
             <a:endParaRPr lang="en-US" sz="1800" dirty="0"/>
-          </a:p>
-        </p:txBody>
-      </p:sp>
-    </p:spTree>
-  </p:cSld>
-  <p:clrMapOvr>
-    <a:masterClrMapping/>
-  </p:clrMapOvr>
-</p:sld>
-</file>
-
-<file path=ppt/slides/slide40.xml><?xml version="1.0" encoding="utf-8"?>
-<p:sld xmlns:a="http://schemas.openxmlformats.org/drawingml/2006/main" xmlns:p="http://schemas.openxmlformats.org/presentationml/2006/main" xmlns:r="http://schemas.openxmlformats.org/officeDocument/2006/relationships">
-  <p:cSld>
-    <p:spTree>
-      <p:nvGrpSpPr>
-        <p:cNvPr id="1" name=""/>
-        <p:cNvGrpSpPr/>
-        <p:nvPr/>
-      </p:nvGrpSpPr>
-      <p:grpSpPr/>
-      <p:sp>
-        <p:nvSpPr>
-          <p:cNvPr id="2" name="TextBox 1"/>
-          <p:cNvSpPr txBox="1"/>
-          <p:nvPr/>
-        </p:nvSpPr>
-        <p:spPr>
-          <a:xfrm>
-            <a:off x="640080" y="640080"/>
-            <a:ext cx="17007840" cy="9006840"/>
-          </a:xfrm>
-          <a:prstGeom prst="rect">
-            <a:avLst/>
-          </a:prstGeom>
-          <a:noFill/>
-        </p:spPr>
-        <p:txBody>
-          <a:bodyPr wrap="square">
-            <a:spAutoFit/>
-          </a:bodyPr>
-          <a:lstStyle/>
-          <a:p>
-            <a:pPr>
-              <a:spcAft>
-                <a:spcPts val="1400"/>
-              </a:spcAft>
-            </a:pPr>
-            <a:r>
-              <a:rPr sz="2600" b="1">
-                <a:solidFill>
-                  <a:srgbClr val="0A1E3D"/>
-                </a:solidFill>
-              </a:rPr>
-              <a:t>Licence &amp; Attribution</a:t>
-            </a:r>
-          </a:p>
-          <a:p>
-            <a:pPr>
-              <a:spcAft>
-                <a:spcPts val="1000"/>
-              </a:spcAft>
-            </a:pPr>
-            <a:r>
-              <a:rPr sz="1400" b="1">
-                <a:solidFill>
-                  <a:srgbClr val="1565C0"/>
-                </a:solidFill>
-              </a:rPr>
-              <a:t>© 2026 Emilie Harrison — Swim &amp; Water Safety Teaching Hub</a:t>
-            </a:r>
-          </a:p>
-          <a:p>
-            <a:pPr>
-              <a:spcAft>
-                <a:spcPts val="1000"/>
-              </a:spcAft>
-            </a:pPr>
-            <a:r>
-              <a:rPr sz="1200" b="0">
-                <a:solidFill>
-                  <a:srgbClr val="1A2840"/>
-                </a:solidFill>
-              </a:rPr>
-              <a:t>Licensed under Creative Commons Attribution 4.0 International (CC BY 4.0). You are free to copy, adapt, remix and redistribute this deck — including commercially — provided you credit the author and indicate any changes.</a:t>
-            </a:r>
-          </a:p>
-          <a:p>
-            <a:pPr>
-              <a:spcAft>
-                <a:spcPts val="1000"/>
-              </a:spcAft>
-            </a:pPr>
-            <a:r>
-              <a:rPr sz="1100" b="0">
-                <a:solidFill>
-                  <a:srgbClr val="5A6E8A"/>
-                </a:solidFill>
-              </a:rPr>
-              <a:t>Attribution: "Swim &amp; Water Safety Teaching Hub" by Emilie Harrison, CC BY 4.0. Source: emilie-harrison.github.io/swim-water-safety</a:t>
-            </a:r>
-          </a:p>
-          <a:p>
-            <a:pPr>
-              <a:spcAft>
-                <a:spcPts val="1000"/>
-              </a:spcAft>
-            </a:pPr>
-            <a:r>
-              <a:rPr sz="1100" b="0">
-                <a:solidFill>
-                  <a:srgbClr val="5A6E8A"/>
-                </a:solidFill>
-              </a:rPr>
-              <a:t>Third-party material is not covered by this licence. Content owned by Life Saving Victoria, Royal Life Saving Australia, Surf Life Saving Australia, VCAA, ACARA, AIATSIS and the Australian Resuscitation Council — including drowning data, clinical guidelines, curriculum content, logos and program names — remains with its owners.</a:t>
-            </a:r>
-          </a:p>
-          <a:p>
-            <a:pPr>
-              <a:spcAft>
-                <a:spcPts val="1000"/>
-              </a:spcAft>
-            </a:pPr>
-            <a:r>
-              <a:rPr sz="1000" b="0">
-                <a:solidFill>
-                  <a:srgbClr val="5A6E8A"/>
-                </a:solidFill>
-              </a:rPr>
-              <a:t>Statistics: Life Saving Victoria, Victorian Drowning Report 2024–25. Deck updated September 2026.</a:t>
-            </a:r>
-          </a:p>
-          <a:p>
-            <a:pPr>
-              <a:spcAft>
-                <a:spcPts val="300"/>
-              </a:spcAft>
-            </a:pPr>
-            <a:r>
-              <a:rPr sz="1000">
-                <a:solidFill>
-                  <a:srgbClr val="5A6E8A"/>
-                </a:solidFill>
-              </a:rPr>
-              <a:t>Data sources cited in this deck — retain these citations if you adapt it:</a:t>
-            </a:r>
-          </a:p>
-          <a:p>
-            <a:pPr>
-              <a:spcAft>
-                <a:spcPts val="300"/>
-              </a:spcAft>
-            </a:pPr>
-            <a:r>
-              <a:rPr sz="1000">
-                <a:solidFill>
-                  <a:srgbClr val="5A6E8A"/>
-                </a:solidFill>
-              </a:rPr>
-              <a:t>• Life Saving Victoria. (2025). Victorian Drowning Report 2024–25. Life Saving Victoria: Melbourne.</a:t>
-            </a:r>
-          </a:p>
-          <a:p>
-            <a:pPr>
-              <a:spcAft>
-                <a:spcPts val="300"/>
-              </a:spcAft>
-            </a:pPr>
-            <a:r>
-              <a:rPr sz="1000">
-                <a:solidFill>
-                  <a:srgbClr val="5A6E8A"/>
-                </a:solidFill>
-              </a:rPr>
-              <a:t>• Royal Life Saving Australia (2026). National Drowning Report 2026. RLSSA: Sydney.</a:t>
-            </a:r>
-          </a:p>
-          <a:p>
-            <a:pPr>
-              <a:spcAft>
-                <a:spcPts val="300"/>
-              </a:spcAft>
-            </a:pPr>
-            <a:r>
-              <a:rPr sz="1000">
-                <a:solidFill>
-                  <a:srgbClr val="5A6E8A"/>
-                </a:solidFill>
-              </a:rPr>
-              <a:t>• Surf Life Saving Australia (2026). Summer Coastal Drowning Report 2025/26. SLSA: Sydney.</a:t>
-            </a:r>
-          </a:p>
-          <a:p>
-            <a:pPr>
-              <a:spcAft>
-                <a:spcPts val="300"/>
-              </a:spcAft>
-            </a:pPr>
-            <a:r>
-              <a:rPr sz="1000">
-                <a:solidFill>
-                  <a:srgbClr val="5A6E8A"/>
-                </a:solidFill>
-              </a:rPr>
-              <a:t>These figures remain the property of the publishing organisations.</a:t>
-            </a:r>
           </a:p>
         </p:txBody>
       </p:sp>
@@ -31198,10 +30307,6 @@
           </a:solidFill>
           <a:ln/>
         </p:spPr>
-        <p:txBody>
-          <a:bodyPr/>
-          <a:p/>
-        </p:txBody>
       </p:sp>
       <p:sp>
         <p:nvSpPr>
@@ -31412,7 +30517,7 @@
                 <a:ea typeface="Courier New" pitchFamily="34" charset="-122"/>
                 <a:cs typeface="Courier New" pitchFamily="34" charset="-120"/>
               </a:rPr>
-              <a:t>SOURCE · LSV VICTORIAN DROWNING REPORT 2024–25</a:t>
+              <a:t>SOURCE · LSV VICTORIAN DROWNING REPORT 2023–24</a:t>
             </a:r>
             <a:endParaRPr lang="en-US" sz="1800" dirty="0"/>
           </a:p>
@@ -31485,7 +30590,7 @@
                 <a:ea typeface="Courier New" pitchFamily="34" charset="-122"/>
                 <a:cs typeface="Courier New" pitchFamily="34" charset="-120"/>
               </a:rPr>
-              <a:t>VICTORIA · 2024–25 · LIFE SAVING VICTORIA REPORT</a:t>
+              <a:t>VICTORIA · 2023–24 · LIFE SAVING VICTORIA REPORT</a:t>
             </a:r>
             <a:endParaRPr lang="en-US" sz="1800" dirty="0"/>
           </a:p>
@@ -31595,10 +30700,6 @@
           </a:solidFill>
           <a:ln/>
         </p:spPr>
-        <p:txBody>
-          <a:bodyPr/>
-          <a:p/>
-        </p:txBody>
       </p:sp>
       <p:sp>
         <p:nvSpPr>
@@ -31638,7 +30739,7 @@
                 <a:ea typeface="Arial" pitchFamily="34" charset="-122"/>
                 <a:cs typeface="Arial" pitchFamily="34" charset="-120"/>
               </a:rPr>
-              <a:t>52</a:t>
+              <a:t>54</a:t>
             </a:r>
             <a:endParaRPr lang="en-US" sz="15000" dirty="0"/>
           </a:p>
@@ -31748,10 +30849,6 @@
           </a:solidFill>
           <a:ln/>
         </p:spPr>
-        <p:txBody>
-          <a:bodyPr/>
-          <a:p/>
-        </p:txBody>
       </p:sp>
       <p:sp>
         <p:nvSpPr>
@@ -31893,7 +30990,7 @@
                 <a:ea typeface="Courier New" pitchFamily="34" charset="-122"/>
                 <a:cs typeface="Courier New" pitchFamily="34" charset="-120"/>
               </a:rPr>
-              <a:t>MULTICULTURAL COMMUNITIES</a:t>
+              <a:t>CALD COMMUNITIES</a:t>
             </a:r>
             <a:endParaRPr lang="en-US" sz="1800" dirty="0"/>
           </a:p>
@@ -31918,10 +31015,6 @@
           </a:solidFill>
           <a:ln/>
         </p:spPr>
-        <p:txBody>
-          <a:bodyPr/>
-          <a:p/>
-        </p:txBody>
       </p:sp>
       <p:sp>
         <p:nvSpPr>
@@ -31961,7 +31054,7 @@
                 <a:ea typeface="Arial" pitchFamily="34" charset="-122"/>
                 <a:cs typeface="Arial" pitchFamily="34" charset="-120"/>
               </a:rPr>
-              <a:t>37%</a:t>
+              <a:t>~40</a:t>
             </a:r>
             <a:pPr algn="l" indent="0" marL="0">
               <a:lnSpc>
@@ -31978,7 +31071,7 @@
                 <a:ea typeface="Arial" pitchFamily="34" charset="-122"/>
                 <a:cs typeface="Arial" pitchFamily="34" charset="-120"/>
               </a:rPr>
-              <a:t/>
+              <a:t>%</a:t>
             </a:r>
             <a:endParaRPr lang="en-US" sz="15000" dirty="0"/>
           </a:p>
@@ -32088,10 +31181,6 @@
           </a:solidFill>
           <a:ln/>
         </p:spPr>
-        <p:txBody>
-          <a:bodyPr/>
-          <a:p/>
-        </p:txBody>
       </p:sp>
       <p:sp>
         <p:nvSpPr>
@@ -32175,7 +31264,7 @@
                 <a:ea typeface="Arial" pitchFamily="34" charset="-122"/>
                 <a:cs typeface="Arial" pitchFamily="34" charset="-120"/>
               </a:rPr>
-              <a:t>Zero of the 52 deaths occurred in a public swimming pool — first time since 2019–20.</a:t>
+              <a:t>Zero of the 54 deaths occurred between the flags at a patrolled location.</a:t>
             </a:r>
             <a:endParaRPr lang="en-US" sz="1950" dirty="0"/>
           </a:p>
@@ -32314,10 +31403,6 @@
           </a:solidFill>
           <a:ln/>
         </p:spPr>
-        <p:txBody>
-          <a:bodyPr/>
-          <a:p/>
-        </p:txBody>
       </p:sp>
       <p:sp>
         <p:nvSpPr>
@@ -32400,7 +31485,7 @@
                 <a:ea typeface="Arial" pitchFamily="34" charset="-122"/>
                 <a:cs typeface="Arial" pitchFamily="34" charset="-120"/>
               </a:rPr>
-              <a:t>37%</a:t>
+              <a:t>40</a:t>
             </a:r>
             <a:pPr algn="l" indent="0" marL="0">
               <a:lnSpc>
@@ -32417,7 +31502,7 @@
                 <a:ea typeface="Arial" pitchFamily="34" charset="-122"/>
                 <a:cs typeface="Arial" pitchFamily="34" charset="-120"/>
               </a:rPr>
-              <a:t/>
+              <a:t>%</a:t>
             </a:r>
             <a:endParaRPr lang="en-US" sz="36000" dirty="0"/>
           </a:p>
@@ -32461,7 +31546,7 @@
                 <a:ea typeface="Arial" pitchFamily="34" charset="-122"/>
                 <a:cs typeface="Arial" pitchFamily="34" charset="-120"/>
               </a:rPr>
-              <a:t xml:space="preserve">of Victorian drowning deaths since 2015–16 were people from multicultural backgrounds — 185 deaths. Country of birth was unknown in a further 22% of cases, so 37% is a lower bound.</a:t>
+              <a:t xml:space="preserve">of Victorian drowning deaths in 2023–24 were people from </a:t>
             </a:r>
             <a:pPr algn="l" indent="0" marL="0">
               <a:lnSpc>
@@ -32478,7 +31563,7 @@
                 <a:ea typeface="Arial" pitchFamily="34" charset="-122"/>
                 <a:cs typeface="Arial" pitchFamily="34" charset="-120"/>
               </a:rPr>
-              <a:t xml:space="preserve"/>
+              <a:t xml:space="preserve">Culturally &amp; Linguistically Diverse </a:t>
             </a:r>
             <a:pPr algn="l" indent="0" marL="0">
               <a:lnSpc>
@@ -32495,7 +31580,7 @@
                 <a:ea typeface="Arial" pitchFamily="34" charset="-122"/>
                 <a:cs typeface="Arial" pitchFamily="34" charset="-120"/>
               </a:rPr>
-              <a:t/>
+              <a:t>communities — despite CALD Victorians making up roughly half that share of the state's population.</a:t>
             </a:r>
             <a:endParaRPr lang="en-US" sz="2850" dirty="0"/>
           </a:p>
@@ -32703,7 +31788,7 @@
                 <a:ea typeface="Courier New" pitchFamily="34" charset="-122"/>
                 <a:cs typeface="Courier New" pitchFamily="34" charset="-120"/>
               </a:rPr>
-              <a:t>SOURCE · LSV VICTORIAN DROWNING REPORT 2024–25</a:t>
+              <a:t>SOURCE · LSV VICTORIAN DROWNING REPORT 2023–24</a:t>
             </a:r>
             <a:endParaRPr lang="en-US" sz="1800" dirty="0"/>
           </a:p>
@@ -32845,10 +31930,6 @@
           </a:solidFill>
           <a:ln/>
         </p:spPr>
-        <p:txBody>
-          <a:bodyPr/>
-          <a:p/>
-        </p:txBody>
       </p:sp>
       <p:sp>
         <p:nvSpPr>
@@ -32869,10 +31950,6 @@
           </a:solidFill>
           <a:ln/>
         </p:spPr>
-        <p:txBody>
-          <a:bodyPr/>
-          <a:p/>
-        </p:txBody>
       </p:sp>
       <p:sp>
         <p:nvSpPr>
@@ -32893,10 +31970,6 @@
           </a:solidFill>
           <a:ln/>
         </p:spPr>
-        <p:txBody>
-          <a:bodyPr/>
-          <a:p/>
-        </p:txBody>
       </p:sp>
       <p:sp>
         <p:nvSpPr>
@@ -32917,10 +31990,6 @@
           </a:solidFill>
           <a:ln/>
         </p:spPr>
-        <p:txBody>
-          <a:bodyPr/>
-          <a:p/>
-        </p:txBody>
       </p:sp>
       <p:sp>
         <p:nvSpPr>
@@ -32941,10 +32010,6 @@
           </a:solidFill>
           <a:ln/>
         </p:spPr>
-        <p:txBody>
-          <a:bodyPr/>
-          <a:p/>
-        </p:txBody>
       </p:sp>
       <p:sp>
         <p:nvSpPr>
@@ -32981,7 +32046,7 @@
                 <a:ea typeface="Courier New" pitchFamily="34" charset="-122"/>
                 <a:cs typeface="Courier New" pitchFamily="34" charset="-120"/>
               </a:rPr>
-              <a:t>VICTORIA · 2024–25</a:t>
+              <a:t>VICTORIA · 2023–24</a:t>
             </a:r>
             <a:endParaRPr lang="en-US" sz="1800" dirty="0"/>
           </a:p>
@@ -33022,7 +32087,7 @@
                 <a:ea typeface="Courier New" pitchFamily="34" charset="-122"/>
                 <a:cs typeface="Courier New" pitchFamily="34" charset="-120"/>
               </a:rPr>
-              <a:t>52 ÷ 6,900,000 × 100,000</a:t>
+              <a:t>54 ÷ 6,900,000 × 100,000</a:t>
             </a:r>
             <a:endParaRPr lang="en-US" sz="2100" dirty="0"/>
           </a:p>
@@ -33066,7 +32131,7 @@
                 <a:ea typeface="Arial" pitchFamily="34" charset="-122"/>
                 <a:cs typeface="Arial" pitchFamily="34" charset="-120"/>
               </a:rPr>
-              <a:t>0.75</a:t>
+              <a:t>0.78</a:t>
             </a:r>
             <a:endParaRPr lang="en-US" sz="7500" dirty="0"/>
           </a:p>
@@ -33110,7 +32175,7 @@
                 <a:ea typeface="Arial" pitchFamily="34" charset="-122"/>
                 <a:cs typeface="Arial" pitchFamily="34" charset="-120"/>
               </a:rPr>
-              <a:t>per 100,000 people · LSV 2024–25</a:t>
+              <a:t>per 100,000 people · LSV 2023–24</a:t>
             </a:r>
             <a:endParaRPr lang="en-US" sz="1950" dirty="0"/>
           </a:p>
@@ -33140,10 +32205,6 @@
             <a:prstDash val="solid"/>
           </a:ln>
         </p:spPr>
-        <p:txBody>
-          <a:bodyPr/>
-          <a:p/>
-        </p:txBody>
       </p:sp>
       <p:sp>
         <p:nvSpPr>
@@ -33339,10 +32400,6 @@
             <a:prstDash val="solid"/>
           </a:ln>
         </p:spPr>
-        <p:txBody>
-          <a:bodyPr/>
-          <a:p/>
-        </p:txBody>
       </p:sp>
       <p:sp>
         <p:nvSpPr>
@@ -33533,10 +32590,6 @@
           </a:solidFill>
           <a:ln/>
         </p:spPr>
-        <p:txBody>
-          <a:bodyPr/>
-          <a:p/>
-        </p:txBody>
       </p:sp>
       <p:sp>
         <p:nvSpPr>
@@ -33557,10 +32610,6 @@
           </a:solidFill>
           <a:ln/>
         </p:spPr>
-        <p:txBody>
-          <a:bodyPr/>
-          <a:p/>
-        </p:txBody>
       </p:sp>
       <p:sp>
         <p:nvSpPr>
@@ -33939,10 +32988,6 @@
           </a:solidFill>
           <a:ln/>
         </p:spPr>
-        <p:txBody>
-          <a:bodyPr/>
-          <a:p/>
-        </p:txBody>
       </p:sp>
       <p:sp>
         <p:nvSpPr>
@@ -34026,7 +33071,7 @@
                 <a:ea typeface="Arial" pitchFamily="34" charset="-122"/>
                 <a:cs typeface="Arial" pitchFamily="34" charset="-120"/>
               </a:rPr>
-              <a:t>Around 300,000 people drown each year worldwide; 92% in low- and middle-income countries (WHO, 2024).</a:t>
+              <a:t>An estimated 320,000 people drown each year worldwide (WHO).</a:t>
             </a:r>
             <a:endParaRPr lang="en-US" sz="1950" dirty="0"/>
           </a:p>
@@ -34092,10 +33137,6 @@
           </a:solidFill>
           <a:ln/>
         </p:spPr>
-        <p:txBody>
-          <a:bodyPr/>
-          <a:p/>
-        </p:txBody>
       </p:sp>
       <p:sp>
         <p:nvSpPr>
@@ -34262,10 +33303,6 @@
           </a:solidFill>
           <a:ln/>
         </p:spPr>
-        <p:txBody>
-          <a:bodyPr/>
-          <a:p/>
-        </p:txBody>
       </p:sp>
       <p:sp>
         <p:nvSpPr>
@@ -34432,10 +33469,6 @@
           </a:solidFill>
           <a:ln/>
         </p:spPr>
-        <p:txBody>
-          <a:bodyPr/>
-          <a:p/>
-        </p:txBody>
       </p:sp>
       <p:sp>
         <p:nvSpPr>
